--- a/Git_GitHub入門_勉強会資料.pptx
+++ b/Git_GitHub入門_勉強会資料.pptx
@@ -4,6 +4,9 @@
   <p:sldMasterIdLst>
     <p:sldMasterId id="2147483648" r:id="rId1"/>
   </p:sldMasterIdLst>
+  <p:notesMasterIdLst>
+    <p:notesMasterId r:id="rId16"/>
+  </p:notesMasterIdLst>
   <p:sldIdLst>
     <p:sldId id="256" r:id="rId2"/>
     <p:sldId id="257" r:id="rId3"/>
@@ -20,9 +23,6 @@
     <p:sldId id="268" r:id="rId14"/>
     <p:sldId id="269" r:id="rId15"/>
   </p:sldIdLst>
-  <p:notesMasterIdLst>
-    <p:notesMasterId r:id="rId16"/>
-  </p:notesMasterIdLst>
   <p:sldSz cx="12192000" cy="6858000"/>
   <p:notesSz cx="6858000" cy="12192000"/>
   <p:defaultTextStyle>
@@ -117,6 +117,11 @@
       </a:defRPr>
     </a:lvl9pPr>
   </p:defaultTextStyle>
+  <p:extLst>
+    <p:ext uri="{EFAFB233-063F-42B5-8137-9DF3F51BA10A}">
+      <p15:sldGuideLst xmlns:p15="http://schemas.microsoft.com/office/powerpoint/2012/main"/>
+    </p:ext>
+  </p:extLst>
 </p:presentation>
 </file>
 
@@ -142,241 +147,17 @@
           <a:chExt cx="0" cy="0"/>
         </a:xfrm>
       </p:grpSpPr>
-      <p:sp>
-        <p:nvSpPr>
-          <p:cNvPr id="2" name="Header Placeholder 1"/>
-          <p:cNvSpPr>
-            <a:spLocks noGrp="1"/>
-          </p:cNvSpPr>
-          <p:nvPr>
-            <p:ph type="hdr" sz="quarter"/>
-          </p:nvPr>
-        </p:nvSpPr>
-        <p:spPr>
-          <a:xfrm>
-            <a:off x="0" y="0"/>
-            <a:ext cx="2971800" cy="458788"/>
-          </a:xfrm>
-          <a:prstGeom prst="rect">
-            <a:avLst/>
-          </a:prstGeom>
-        </p:spPr>
-        <p:txBody>
-          <a:bodyPr vert="horz" lIns="91440" tIns="45720" rIns="91440" bIns="45720" rtlCol="0"/>
-          <a:lstStyle>
-            <a:lvl1pPr algn="l">
-              <a:defRPr sz="1200"/>
-            </a:lvl1pPr>
-          </a:lstStyle>
-          <a:p>
-            <a:endParaRPr lang="en-US"/>
-          </a:p>
-        </p:txBody>
-      </p:sp>
-      <p:sp>
-        <p:nvSpPr>
-          <p:cNvPr id="3" name="Date Placeholder 2"/>
-          <p:cNvSpPr>
-            <a:spLocks noGrp="1"/>
-          </p:cNvSpPr>
-          <p:nvPr>
-            <p:ph type="dt" idx="1"/>
-          </p:nvPr>
-        </p:nvSpPr>
-        <p:spPr>
-          <a:xfrm>
-            <a:off x="3884613" y="0"/>
-            <a:ext cx="2971800" cy="458788"/>
-          </a:xfrm>
-          <a:prstGeom prst="rect">
-            <a:avLst/>
-          </a:prstGeom>
-        </p:spPr>
-        <p:txBody>
-          <a:bodyPr vert="horz" lIns="91440" tIns="45720" rIns="91440" bIns="45720" rtlCol="0"/>
-          <a:lstStyle>
-            <a:lvl1pPr algn="r">
-              <a:defRPr sz="1200"/>
-            </a:lvl1pPr>
-          </a:lstStyle>
-          <a:p>
-            <a:fld id="{5282F153-3F37-0F45-9E97-73ACFA13230C}" type="datetimeFigureOut">
-              <a:rPr lang="en-US"/>
-              <a:t>7/23/19</a:t>
-            </a:fld>
-            <a:endParaRPr lang="en-US"/>
-          </a:p>
-        </p:txBody>
-      </p:sp>
-      <p:sp>
-        <p:nvSpPr>
-          <p:cNvPr id="4" name="Slide Image Placeholder 3"/>
-          <p:cNvSpPr>
-            <a:spLocks noGrp="1" noRot="1" noChangeAspect="1"/>
-          </p:cNvSpPr>
-          <p:nvPr>
-            <p:ph type="sldImg" idx="2"/>
-          </p:nvPr>
-        </p:nvSpPr>
-        <p:spPr>
-          <a:xfrm>
-            <a:off x="685800" y="1143000"/>
-            <a:ext cx="5486400" cy="3086100"/>
-          </a:xfrm>
-          <a:prstGeom prst="rect">
-            <a:avLst/>
-          </a:prstGeom>
-          <a:noFill/>
-          <a:ln w="12700">
-            <a:solidFill>
-              <a:prstClr val="black"/>
-            </a:solidFill>
-          </a:ln>
-        </p:spPr>
-        <p:txBody>
-          <a:bodyPr vert="horz" lIns="91440" tIns="45720" rIns="91440" bIns="45720" rtlCol="0" anchor="ctr"/>
-          <a:lstStyle/>
-          <a:p>
-            <a:endParaRPr lang="en-US"/>
-          </a:p>
-        </p:txBody>
-      </p:sp>
-      <p:sp>
-        <p:nvSpPr>
-          <p:cNvPr id="5" name="Notes Placeholder 4"/>
-          <p:cNvSpPr>
-            <a:spLocks noGrp="1"/>
-          </p:cNvSpPr>
-          <p:nvPr>
-            <p:ph type="body" sz="quarter" idx="3"/>
-          </p:nvPr>
-        </p:nvSpPr>
-        <p:spPr>
-          <a:xfrm>
-            <a:off x="685800" y="4400550"/>
-            <a:ext cx="5486400" cy="3600450"/>
-          </a:xfrm>
-          <a:prstGeom prst="rect">
-            <a:avLst/>
-          </a:prstGeom>
-        </p:spPr>
-        <p:txBody>
-          <a:bodyPr vert="horz" lIns="91440" tIns="45720" rIns="91440" bIns="45720" rtlCol="0"/>
-          <a:lstStyle/>
-          <a:p>
-            <a:pPr lvl="0"/>
-            <a:r>
-              <a:rPr lang="en-US"/>
-              <a:t>Click to edit Master text styles</a:t>
-            </a:r>
-          </a:p>
-          <a:p>
-            <a:pPr lvl="1"/>
-            <a:r>
-              <a:rPr lang="en-US"/>
-              <a:t>Second level</a:t>
-            </a:r>
-          </a:p>
-          <a:p>
-            <a:pPr lvl="2"/>
-            <a:r>
-              <a:rPr lang="en-US"/>
-              <a:t>Third level</a:t>
-            </a:r>
-          </a:p>
-          <a:p>
-            <a:pPr lvl="3"/>
-            <a:r>
-              <a:rPr lang="en-US"/>
-              <a:t>Fourth level</a:t>
-            </a:r>
-          </a:p>
-          <a:p>
-            <a:pPr lvl="4"/>
-            <a:r>
-              <a:rPr lang="en-US"/>
-              <a:t>Fifth level</a:t>
-            </a:r>
-          </a:p>
-        </p:txBody>
-      </p:sp>
-      <p:sp>
-        <p:nvSpPr>
-          <p:cNvPr id="6" name="Footer Placeholder 5"/>
-          <p:cNvSpPr>
-            <a:spLocks noGrp="1"/>
-          </p:cNvSpPr>
-          <p:nvPr>
-            <p:ph type="ftr" sz="quarter" idx="4"/>
-          </p:nvPr>
-        </p:nvSpPr>
-        <p:spPr>
-          <a:xfrm>
-            <a:off x="0" y="8685213"/>
-            <a:ext cx="2971800" cy="458787"/>
-          </a:xfrm>
-          <a:prstGeom prst="rect">
-            <a:avLst/>
-          </a:prstGeom>
-        </p:spPr>
-        <p:txBody>
-          <a:bodyPr vert="horz" lIns="91440" tIns="45720" rIns="91440" bIns="45720" rtlCol="0" anchor="b"/>
-          <a:lstStyle>
-            <a:lvl1pPr algn="l">
-              <a:defRPr sz="1200"/>
-            </a:lvl1pPr>
-          </a:lstStyle>
-          <a:p>
-            <a:endParaRPr lang="en-US"/>
-          </a:p>
-        </p:txBody>
-      </p:sp>
-      <p:sp>
-        <p:nvSpPr>
-          <p:cNvPr id="7" name="Slide Number Placeholder 6"/>
-          <p:cNvSpPr>
-            <a:spLocks noGrp="1"/>
-          </p:cNvSpPr>
-          <p:nvPr>
-            <p:ph type="sldNum" sz="quarter" idx="5"/>
-          </p:nvPr>
-        </p:nvSpPr>
-        <p:spPr>
-          <a:xfrm>
-            <a:off x="3884613" y="8685213"/>
-            <a:ext cx="2971800" cy="458787"/>
-          </a:xfrm>
-          <a:prstGeom prst="rect">
-            <a:avLst/>
-          </a:prstGeom>
-        </p:spPr>
-        <p:txBody>
-          <a:bodyPr vert="horz" lIns="91440" tIns="45720" rIns="91440" bIns="45720" rtlCol="0" anchor="b"/>
-          <a:lstStyle>
-            <a:lvl1pPr algn="r">
-              <a:defRPr sz="1200"/>
-            </a:lvl1pPr>
-          </a:lstStyle>
-          <a:p>
-            <a:fld id="{CE5E9CC1-C706-0F49-92D6-E571CC5EEA8F}" type="slidenum">
-              <a:rPr lang="en-US"/>
-              <a:t>‹#›</a:t>
-            </a:fld>
-            <a:endParaRPr lang="en-US"/>
-          </a:p>
-        </p:txBody>
-      </p:sp>
     </p:spTree>
     <p:extLst>
       <p:ext uri="{BB962C8B-B14F-4D97-AF65-F5344CB8AC3E}">
-        <p14:creationId xmlns:p14="http://schemas.microsoft.com/office/powerpoint/2010/main" val="1024086991"/>
+        <p14:creationId xmlns:p14="http://schemas.microsoft.com/office/powerpoint/2010/main" val="3459667849"/>
       </p:ext>
     </p:extLst>
   </p:cSld>
   <p:clrMap bg1="lt1" tx1="dk1" bg2="lt2" tx2="dk2" accent1="accent1" accent2="accent2" accent3="accent3" accent4="accent4" accent5="accent5" accent6="accent6" hlink="hlink" folHlink="folHlink"/>
   <p:notesStyle>
     <a:lvl1pPr marL="0" algn="l" defTabSz="914400" rtl="0" eaLnBrk="1" latinLnBrk="0" hangingPunct="1">
-      <a:defRPr sz="1200" kern="1200">
+      <a:defRPr kumimoji="1" sz="1200" kern="1200">
         <a:solidFill>
           <a:schemeClr val="tx1"/>
         </a:solidFill>
@@ -386,7 +167,7 @@
       </a:defRPr>
     </a:lvl1pPr>
     <a:lvl2pPr marL="457200" algn="l" defTabSz="914400" rtl="0" eaLnBrk="1" latinLnBrk="0" hangingPunct="1">
-      <a:defRPr sz="1200" kern="1200">
+      <a:defRPr kumimoji="1" sz="1200" kern="1200">
         <a:solidFill>
           <a:schemeClr val="tx1"/>
         </a:solidFill>
@@ -396,7 +177,7 @@
       </a:defRPr>
     </a:lvl2pPr>
     <a:lvl3pPr marL="914400" algn="l" defTabSz="914400" rtl="0" eaLnBrk="1" latinLnBrk="0" hangingPunct="1">
-      <a:defRPr sz="1200" kern="1200">
+      <a:defRPr kumimoji="1" sz="1200" kern="1200">
         <a:solidFill>
           <a:schemeClr val="tx1"/>
         </a:solidFill>
@@ -406,7 +187,7 @@
       </a:defRPr>
     </a:lvl3pPr>
     <a:lvl4pPr marL="1371600" algn="l" defTabSz="914400" rtl="0" eaLnBrk="1" latinLnBrk="0" hangingPunct="1">
-      <a:defRPr sz="1200" kern="1200">
+      <a:defRPr kumimoji="1" sz="1200" kern="1200">
         <a:solidFill>
           <a:schemeClr val="tx1"/>
         </a:solidFill>
@@ -416,7 +197,7 @@
       </a:defRPr>
     </a:lvl4pPr>
     <a:lvl5pPr marL="1828800" algn="l" defTabSz="914400" rtl="0" eaLnBrk="1" latinLnBrk="0" hangingPunct="1">
-      <a:defRPr sz="1200" kern="1200">
+      <a:defRPr kumimoji="1" sz="1200" kern="1200">
         <a:solidFill>
           <a:schemeClr val="tx1"/>
         </a:solidFill>
@@ -426,7 +207,7 @@
       </a:defRPr>
     </a:lvl5pPr>
     <a:lvl6pPr marL="2286000" algn="l" defTabSz="914400" rtl="0" eaLnBrk="1" latinLnBrk="0" hangingPunct="1">
-      <a:defRPr sz="1200" kern="1200">
+      <a:defRPr kumimoji="1" sz="1200" kern="1200">
         <a:solidFill>
           <a:schemeClr val="tx1"/>
         </a:solidFill>
@@ -436,7 +217,7 @@
       </a:defRPr>
     </a:lvl6pPr>
     <a:lvl7pPr marL="2743200" algn="l" defTabSz="914400" rtl="0" eaLnBrk="1" latinLnBrk="0" hangingPunct="1">
-      <a:defRPr sz="1200" kern="1200">
+      <a:defRPr kumimoji="1" sz="1200" kern="1200">
         <a:solidFill>
           <a:schemeClr val="tx1"/>
         </a:solidFill>
@@ -446,7 +227,7 @@
       </a:defRPr>
     </a:lvl7pPr>
     <a:lvl8pPr marL="3200400" algn="l" defTabSz="914400" rtl="0" eaLnBrk="1" latinLnBrk="0" hangingPunct="1">
-      <a:defRPr sz="1200" kern="1200">
+      <a:defRPr kumimoji="1" sz="1200" kern="1200">
         <a:solidFill>
           <a:schemeClr val="tx1"/>
         </a:solidFill>
@@ -456,7 +237,7 @@
       </a:defRPr>
     </a:lvl8pPr>
     <a:lvl9pPr marL="3657600" algn="l" defTabSz="914400" rtl="0" eaLnBrk="1" latinLnBrk="0" hangingPunct="1">
-      <a:defRPr sz="1200" kern="1200">
+      <a:defRPr kumimoji="1" sz="1200" kern="1200">
         <a:solidFill>
           <a:schemeClr val="tx1"/>
         </a:solidFill>
@@ -513,10 +294,6 @@
           <a:bodyPr/>
           <a:lstStyle/>
           <a:p>
-            <a:r>
-              <a:rPr lang="en-US" dirty="0"/>
-              <a:t/>
-            </a:r>
             <a:endParaRPr lang="en-US" dirty="0"/>
           </a:p>
         </p:txBody>
@@ -601,10 +378,6 @@
           <a:bodyPr/>
           <a:lstStyle/>
           <a:p>
-            <a:r>
-              <a:rPr lang="en-US" dirty="0"/>
-              <a:t/>
-            </a:r>
             <a:endParaRPr lang="en-US" dirty="0"/>
           </a:p>
         </p:txBody>
@@ -689,10 +462,6 @@
           <a:bodyPr/>
           <a:lstStyle/>
           <a:p>
-            <a:r>
-              <a:rPr lang="en-US" dirty="0"/>
-              <a:t/>
-            </a:r>
             <a:endParaRPr lang="en-US" dirty="0"/>
           </a:p>
         </p:txBody>
@@ -777,10 +546,6 @@
           <a:bodyPr/>
           <a:lstStyle/>
           <a:p>
-            <a:r>
-              <a:rPr lang="en-US" dirty="0"/>
-              <a:t/>
-            </a:r>
             <a:endParaRPr lang="en-US" dirty="0"/>
           </a:p>
         </p:txBody>
@@ -865,10 +630,6 @@
           <a:bodyPr/>
           <a:lstStyle/>
           <a:p>
-            <a:r>
-              <a:rPr lang="en-US" dirty="0"/>
-              <a:t/>
-            </a:r>
             <a:endParaRPr lang="en-US" dirty="0"/>
           </a:p>
         </p:txBody>
@@ -953,10 +714,6 @@
           <a:bodyPr/>
           <a:lstStyle/>
           <a:p>
-            <a:r>
-              <a:rPr lang="en-US" dirty="0"/>
-              <a:t/>
-            </a:r>
             <a:endParaRPr lang="en-US" dirty="0"/>
           </a:p>
         </p:txBody>
@@ -1041,10 +798,6 @@
           <a:bodyPr/>
           <a:lstStyle/>
           <a:p>
-            <a:r>
-              <a:rPr lang="en-US" dirty="0"/>
-              <a:t/>
-            </a:r>
             <a:endParaRPr lang="en-US" dirty="0"/>
           </a:p>
         </p:txBody>
@@ -1129,10 +882,6 @@
           <a:bodyPr/>
           <a:lstStyle/>
           <a:p>
-            <a:r>
-              <a:rPr lang="en-US" dirty="0"/>
-              <a:t/>
-            </a:r>
             <a:endParaRPr lang="en-US" dirty="0"/>
           </a:p>
         </p:txBody>
@@ -1217,10 +966,6 @@
           <a:bodyPr/>
           <a:lstStyle/>
           <a:p>
-            <a:r>
-              <a:rPr lang="en-US" dirty="0"/>
-              <a:t/>
-            </a:r>
             <a:endParaRPr lang="en-US" dirty="0"/>
           </a:p>
         </p:txBody>
@@ -1305,10 +1050,6 @@
           <a:bodyPr/>
           <a:lstStyle/>
           <a:p>
-            <a:r>
-              <a:rPr lang="en-US" dirty="0"/>
-              <a:t/>
-            </a:r>
             <a:endParaRPr lang="en-US" dirty="0"/>
           </a:p>
         </p:txBody>
@@ -1393,10 +1134,6 @@
           <a:bodyPr/>
           <a:lstStyle/>
           <a:p>
-            <a:r>
-              <a:rPr lang="en-US" dirty="0"/>
-              <a:t/>
-            </a:r>
             <a:endParaRPr lang="en-US" dirty="0"/>
           </a:p>
         </p:txBody>
@@ -1481,10 +1218,6 @@
           <a:bodyPr/>
           <a:lstStyle/>
           <a:p>
-            <a:r>
-              <a:rPr lang="en-US" dirty="0"/>
-              <a:t/>
-            </a:r>
             <a:endParaRPr lang="en-US" dirty="0"/>
           </a:p>
         </p:txBody>
@@ -1569,10 +1302,6 @@
           <a:bodyPr/>
           <a:lstStyle/>
           <a:p>
-            <a:r>
-              <a:rPr lang="en-US" dirty="0"/>
-              <a:t/>
-            </a:r>
             <a:endParaRPr lang="en-US" dirty="0"/>
           </a:p>
         </p:txBody>
@@ -1657,10 +1386,6 @@
           <a:bodyPr/>
           <a:lstStyle/>
           <a:p>
-            <a:r>
-              <a:rPr lang="en-US" dirty="0"/>
-              <a:t/>
-            </a:r>
             <a:endParaRPr lang="en-US" dirty="0"/>
           </a:p>
         </p:txBody>
@@ -1734,6 +1459,11 @@
 <file path=ppt/slideMasters/slideMaster1.xml><?xml version="1.0" encoding="utf-8"?>
 <p:sldMaster xmlns:a="http://schemas.openxmlformats.org/drawingml/2006/main" xmlns:r="http://schemas.openxmlformats.org/officeDocument/2006/relationships" xmlns:p="http://schemas.openxmlformats.org/presentationml/2006/main">
   <p:cSld>
+    <p:bg>
+      <p:bgRef idx="1001">
+        <a:schemeClr val="bg1"/>
+      </p:bgRef>
+    </p:bg>
     <p:spTree>
       <p:nvGrpSpPr>
         <p:cNvPr id="1" name=""/>
@@ -2016,6 +1746,7 @@
         <a:solidFill>
           <a:srgbClr val="FFFFFF"/>
         </a:solidFill>
+        <a:effectLst/>
       </p:bgPr>
     </p:bg>
     <p:spTree>
@@ -2056,6 +1787,13 @@
             <a:prstDash val="solid"/>
           </a:ln>
         </p:spPr>
+        <p:txBody>
+          <a:bodyPr/>
+          <a:lstStyle/>
+          <a:p>
+            <a:endParaRPr lang="ja-JP" altLang="en-US"/>
+          </a:p>
+        </p:txBody>
       </p:sp>
       <p:sp>
         <p:nvSpPr>
@@ -2078,7 +1816,7 @@
           <a:bodyPr wrap="square" rtlCol="0" anchor="ctr"/>
           <a:lstStyle/>
           <a:p>
-            <a:pPr algn="r" indent="0" marL="0">
+            <a:pPr marL="0" indent="0" algn="r">
               <a:buNone/>
             </a:pPr>
             <a:r>
@@ -2117,7 +1855,7 @@
           <a:bodyPr wrap="square" rtlCol="0" anchor="ctr"/>
           <a:lstStyle/>
           <a:p>
-            <a:pPr indent="0" marL="0">
+            <a:pPr marL="0" indent="0">
               <a:buNone/>
             </a:pPr>
             <a:r>
@@ -2156,7 +1894,7 @@
           <a:bodyPr wrap="square" rtlCol="0" anchor="ctr"/>
           <a:lstStyle/>
           <a:p>
-            <a:pPr indent="0" marL="0">
+            <a:pPr marL="0" indent="0">
               <a:buNone/>
             </a:pPr>
             <a:r>
@@ -2168,7 +1906,40 @@
                 <a:ea typeface="Meiryo UI" pitchFamily="34" charset="-122"/>
                 <a:cs typeface="Meiryo UI" pitchFamily="34" charset="-120"/>
               </a:rPr>
-              <a:t>Git / GitHub 入門</a:t>
+              <a:t>Git / GitHub </a:t>
+            </a:r>
+            <a:r>
+              <a:rPr lang="en-US" sz="4400" b="1" dirty="0" err="1">
+                <a:solidFill>
+                  <a:srgbClr val="333333"/>
+                </a:solidFill>
+                <a:latin typeface="Meiryo UI" pitchFamily="34" charset="0"/>
+                <a:ea typeface="Meiryo UI" pitchFamily="34" charset="-122"/>
+                <a:cs typeface="Meiryo UI" pitchFamily="34" charset="-120"/>
+              </a:rPr>
+              <a:t>入門</a:t>
+            </a:r>
+            <a:r>
+              <a:rPr lang="ja-JP" altLang="en-US" sz="4400" b="1" dirty="0">
+                <a:solidFill>
+                  <a:srgbClr val="333333"/>
+                </a:solidFill>
+                <a:latin typeface="Meiryo UI" pitchFamily="34" charset="0"/>
+                <a:ea typeface="Meiryo UI" pitchFamily="34" charset="-122"/>
+                <a:cs typeface="Meiryo UI" pitchFamily="34" charset="-120"/>
+              </a:rPr>
+              <a:t>　</a:t>
+            </a:r>
+            <a:r>
+              <a:rPr lang="en-US" altLang="ja-JP" sz="4400" b="1">
+                <a:solidFill>
+                  <a:srgbClr val="333333"/>
+                </a:solidFill>
+                <a:latin typeface="Meiryo UI" pitchFamily="34" charset="0"/>
+                <a:ea typeface="Meiryo UI" pitchFamily="34" charset="-122"/>
+                <a:cs typeface="Meiryo UI" pitchFamily="34" charset="-120"/>
+              </a:rPr>
+              <a:t>a</a:t>
             </a:r>
             <a:endParaRPr lang="en-US" sz="4400" dirty="0"/>
           </a:p>
@@ -2195,7 +1966,7 @@
           <a:bodyPr wrap="square" rtlCol="0" anchor="ctr"/>
           <a:lstStyle/>
           <a:p>
-            <a:pPr indent="0" marL="0">
+            <a:pPr marL="0" indent="0">
               <a:buNone/>
             </a:pPr>
             <a:r>
@@ -2237,6 +2008,13 @@
             <a:prstDash val="solid"/>
           </a:ln>
         </p:spPr>
+        <p:txBody>
+          <a:bodyPr/>
+          <a:lstStyle/>
+          <a:p>
+            <a:endParaRPr lang="ja-JP" altLang="en-US"/>
+          </a:p>
+        </p:txBody>
       </p:sp>
       <p:sp>
         <p:nvSpPr>
@@ -2259,7 +2037,7 @@
           <a:bodyPr wrap="square" rtlCol="0" anchor="ctr"/>
           <a:lstStyle/>
           <a:p>
-            <a:pPr indent="0" marL="0">
+            <a:pPr marL="0" indent="0">
               <a:buNone/>
             </a:pPr>
             <a:r>
@@ -2298,7 +2076,7 @@
           <a:bodyPr wrap="square" rtlCol="0" anchor="ctr"/>
           <a:lstStyle/>
           <a:p>
-            <a:pPr indent="0" marL="0">
+            <a:pPr marL="0" indent="0">
               <a:buNone/>
             </a:pPr>
             <a:r>
@@ -2340,6 +2118,13 @@
             <a:prstDash val="solid"/>
           </a:ln>
         </p:spPr>
+        <p:txBody>
+          <a:bodyPr/>
+          <a:lstStyle/>
+          <a:p>
+            <a:endParaRPr lang="ja-JP" altLang="en-US"/>
+          </a:p>
+        </p:txBody>
       </p:sp>
     </p:spTree>
   </p:cSld>
@@ -2357,6 +2142,7 @@
         <a:solidFill>
           <a:srgbClr val="FFFFFF"/>
         </a:solidFill>
+        <a:effectLst/>
       </p:bgPr>
     </p:bg>
     <p:spTree>
@@ -2397,6 +2183,13 @@
             <a:prstDash val="solid"/>
           </a:ln>
         </p:spPr>
+        <p:txBody>
+          <a:bodyPr/>
+          <a:lstStyle/>
+          <a:p>
+            <a:endParaRPr lang="ja-JP" altLang="en-US"/>
+          </a:p>
+        </p:txBody>
       </p:sp>
       <p:sp>
         <p:nvSpPr>
@@ -2419,7 +2212,7 @@
           <a:bodyPr wrap="square" rtlCol="0" anchor="ctr"/>
           <a:lstStyle/>
           <a:p>
-            <a:pPr indent="0" marL="0">
+            <a:pPr marL="0" indent="0">
               <a:buNone/>
             </a:pPr>
             <a:r>
@@ -2458,7 +2251,7 @@
           <a:bodyPr wrap="square" rtlCol="0" anchor="ctr"/>
           <a:lstStyle/>
           <a:p>
-            <a:pPr algn="r" indent="0" marL="0">
+            <a:pPr marL="0" indent="0" algn="r">
               <a:buNone/>
             </a:pPr>
             <a:r>
@@ -2500,6 +2293,13 @@
             <a:prstDash val="solid"/>
           </a:ln>
         </p:spPr>
+        <p:txBody>
+          <a:bodyPr/>
+          <a:lstStyle/>
+          <a:p>
+            <a:endParaRPr lang="ja-JP" altLang="en-US"/>
+          </a:p>
+        </p:txBody>
       </p:sp>
       <p:graphicFrame>
         <p:nvGraphicFramePr>
@@ -2524,9 +2324,27 @@
             <a:tbl>
               <a:tblPr/>
               <a:tblGrid>
-                <a:gridCol w="2377440"/>
-                <a:gridCol w="4343400"/>
-                <a:gridCol w="4343400"/>
+                <a:gridCol w="2377440">
+                  <a:extLst>
+                    <a:ext uri="{9D8B030D-6E8A-4147-A177-3AD203B41FA5}">
+                      <a16:colId xmlns:a16="http://schemas.microsoft.com/office/drawing/2014/main" val="20000"/>
+                    </a:ext>
+                  </a:extLst>
+                </a:gridCol>
+                <a:gridCol w="4343400">
+                  <a:extLst>
+                    <a:ext uri="{9D8B030D-6E8A-4147-A177-3AD203B41FA5}">
+                      <a16:colId xmlns:a16="http://schemas.microsoft.com/office/drawing/2014/main" val="20001"/>
+                    </a:ext>
+                  </a:extLst>
+                </a:gridCol>
+                <a:gridCol w="4343400">
+                  <a:extLst>
+                    <a:ext uri="{9D8B030D-6E8A-4147-A177-3AD203B41FA5}">
+                      <a16:colId xmlns:a16="http://schemas.microsoft.com/office/drawing/2014/main" val="20002"/>
+                    </a:ext>
+                  </a:extLst>
+                </a:gridCol>
               </a:tblGrid>
               <a:tr h="502920">
                 <a:tc>
@@ -2534,7 +2352,7 @@
                     <a:bodyPr/>
                     <a:lstStyle/>
                     <a:p>
-                      <a:pPr algn="ctr" indent="0" marL="0">
+                      <a:pPr marL="0" indent="0" algn="ctr">
                         <a:buNone/>
                       </a:pPr>
                       <a:r>
@@ -2555,7 +2373,7 @@
                       </a:endParaRPr>
                     </a:p>
                   </a:txBody>
-                  <a:tcPr marL="91440" marR="91440" marT="45720" marB="45720" anchor="ctr">
+                  <a:tcPr anchor="ctr">
                     <a:lnL w="9525" cap="flat" cmpd="sng" algn="ctr">
                       <a:solidFill>
                         <a:srgbClr val="D1D5DB"/>
@@ -2602,7 +2420,7 @@
                     <a:bodyPr/>
                     <a:lstStyle/>
                     <a:p>
-                      <a:pPr algn="ctr" indent="0" marL="0">
+                      <a:pPr marL="0" indent="0" algn="ctr">
                         <a:buNone/>
                       </a:pPr>
                       <a:r>
@@ -2623,7 +2441,7 @@
                       </a:endParaRPr>
                     </a:p>
                   </a:txBody>
-                  <a:tcPr marL="91440" marR="91440" marT="45720" marB="45720" anchor="ctr">
+                  <a:tcPr anchor="ctr">
                     <a:lnL w="9525" cap="flat" cmpd="sng" algn="ctr">
                       <a:solidFill>
                         <a:srgbClr val="D1D5DB"/>
@@ -2670,7 +2488,7 @@
                     <a:bodyPr/>
                     <a:lstStyle/>
                     <a:p>
-                      <a:pPr algn="ctr" indent="0" marL="0">
+                      <a:pPr marL="0" indent="0" algn="ctr">
                         <a:buNone/>
                       </a:pPr>
                       <a:r>
@@ -2691,7 +2509,7 @@
                       </a:endParaRPr>
                     </a:p>
                   </a:txBody>
-                  <a:tcPr marL="91440" marR="91440" marT="45720" marB="45720" anchor="ctr">
+                  <a:tcPr anchor="ctr">
                     <a:lnL w="9525" cap="flat" cmpd="sng" algn="ctr">
                       <a:solidFill>
                         <a:srgbClr val="D1D5DB"/>
@@ -2733,6 +2551,11 @@
                     </a:solidFill>
                   </a:tcPr>
                 </a:tc>
+                <a:extLst>
+                  <a:ext uri="{0D108BD9-81ED-4DB2-BD59-A6C34878D82A}">
+                    <a16:rowId xmlns:a16="http://schemas.microsoft.com/office/drawing/2014/main" val="10000"/>
+                  </a:ext>
+                </a:extLst>
               </a:tr>
               <a:tr h="777240">
                 <a:tc>
@@ -2740,7 +2563,7 @@
                     <a:bodyPr/>
                     <a:lstStyle/>
                     <a:p>
-                      <a:pPr algn="l" indent="0" marL="0">
+                      <a:pPr marL="0" indent="0" algn="l">
                         <a:buNone/>
                       </a:pPr>
                       <a:r>
@@ -2761,7 +2584,7 @@
                       </a:endParaRPr>
                     </a:p>
                   </a:txBody>
-                  <a:tcPr marL="91440" marR="91440" marT="45720" marB="45720" anchor="ctr">
+                  <a:tcPr anchor="ctr">
                     <a:lnL w="9525" cap="flat" cmpd="sng" algn="ctr">
                       <a:solidFill>
                         <a:srgbClr val="D1D5DB"/>
@@ -2808,7 +2631,7 @@
                     <a:bodyPr/>
                     <a:lstStyle/>
                     <a:p>
-                      <a:pPr algn="l" indent="0" marL="0">
+                      <a:pPr marL="0" indent="0" algn="l">
                         <a:buNone/>
                       </a:pPr>
                       <a:r>
@@ -2829,7 +2652,7 @@
                       </a:endParaRPr>
                     </a:p>
                     <a:p>
-                      <a:pPr algn="l" indent="0" marL="0">
+                      <a:pPr marL="0" indent="0" algn="l">
                         <a:buNone/>
                       </a:pPr>
                       <a:r>
@@ -2850,7 +2673,7 @@
                       </a:endParaRPr>
                     </a:p>
                   </a:txBody>
-                  <a:tcPr marL="91440" marR="91440" marT="45720" marB="45720" anchor="ctr">
+                  <a:tcPr anchor="ctr">
                     <a:lnL w="9525" cap="flat" cmpd="sng" algn="ctr">
                       <a:solidFill>
                         <a:srgbClr val="D1D5DB"/>
@@ -2897,7 +2720,7 @@
                     <a:bodyPr/>
                     <a:lstStyle/>
                     <a:p>
-                      <a:pPr algn="l" indent="0" marL="0">
+                      <a:pPr marL="0" indent="0" algn="l">
                         <a:buNone/>
                       </a:pPr>
                       <a:r>
@@ -2918,7 +2741,7 @@
                       </a:endParaRPr>
                     </a:p>
                     <a:p>
-                      <a:pPr algn="l" indent="0" marL="0">
+                      <a:pPr marL="0" indent="0" algn="l">
                         <a:buNone/>
                       </a:pPr>
                       <a:r>
@@ -2939,7 +2762,7 @@
                       </a:endParaRPr>
                     </a:p>
                   </a:txBody>
-                  <a:tcPr marL="91440" marR="91440" marT="45720" marB="45720" anchor="ctr">
+                  <a:tcPr anchor="ctr">
                     <a:lnL w="9525" cap="flat" cmpd="sng" algn="ctr">
                       <a:solidFill>
                         <a:srgbClr val="D1D5DB"/>
@@ -2981,6 +2804,11 @@
                     </a:solidFill>
                   </a:tcPr>
                 </a:tc>
+                <a:extLst>
+                  <a:ext uri="{0D108BD9-81ED-4DB2-BD59-A6C34878D82A}">
+                    <a16:rowId xmlns:a16="http://schemas.microsoft.com/office/drawing/2014/main" val="10001"/>
+                  </a:ext>
+                </a:extLst>
               </a:tr>
               <a:tr h="777240">
                 <a:tc>
@@ -2988,7 +2816,7 @@
                     <a:bodyPr/>
                     <a:lstStyle/>
                     <a:p>
-                      <a:pPr algn="l" indent="0" marL="0">
+                      <a:pPr marL="0" indent="0" algn="l">
                         <a:buNone/>
                       </a:pPr>
                       <a:r>
@@ -3009,7 +2837,7 @@
                       </a:endParaRPr>
                     </a:p>
                   </a:txBody>
-                  <a:tcPr marL="91440" marR="91440" marT="45720" marB="45720" anchor="ctr">
+                  <a:tcPr anchor="ctr">
                     <a:lnL w="9525" cap="flat" cmpd="sng" algn="ctr">
                       <a:solidFill>
                         <a:srgbClr val="D1D5DB"/>
@@ -3056,7 +2884,7 @@
                     <a:bodyPr/>
                     <a:lstStyle/>
                     <a:p>
-                      <a:pPr algn="l" indent="0" marL="0">
+                      <a:pPr marL="0" indent="0" algn="l">
                         <a:buNone/>
                       </a:pPr>
                       <a:r>
@@ -3077,7 +2905,7 @@
                       </a:endParaRPr>
                     </a:p>
                     <a:p>
-                      <a:pPr algn="l" indent="0" marL="0">
+                      <a:pPr marL="0" indent="0" algn="l">
                         <a:buNone/>
                       </a:pPr>
                       <a:r>
@@ -3098,7 +2926,7 @@
                       </a:endParaRPr>
                     </a:p>
                   </a:txBody>
-                  <a:tcPr marL="91440" marR="91440" marT="45720" marB="45720" anchor="ctr">
+                  <a:tcPr anchor="ctr">
                     <a:lnL w="9525" cap="flat" cmpd="sng" algn="ctr">
                       <a:solidFill>
                         <a:srgbClr val="D1D5DB"/>
@@ -3145,7 +2973,7 @@
                     <a:bodyPr/>
                     <a:lstStyle/>
                     <a:p>
-                      <a:pPr algn="l" indent="0" marL="0">
+                      <a:pPr marL="0" indent="0" algn="l">
                         <a:buNone/>
                       </a:pPr>
                       <a:r>
@@ -3166,7 +2994,7 @@
                       </a:endParaRPr>
                     </a:p>
                     <a:p>
-                      <a:pPr algn="l" indent="0" marL="0">
+                      <a:pPr marL="0" indent="0" algn="l">
                         <a:buNone/>
                       </a:pPr>
                       <a:r>
@@ -3187,7 +3015,7 @@
                       </a:endParaRPr>
                     </a:p>
                   </a:txBody>
-                  <a:tcPr marL="91440" marR="91440" marT="45720" marB="45720" anchor="ctr">
+                  <a:tcPr anchor="ctr">
                     <a:lnL w="9525" cap="flat" cmpd="sng" algn="ctr">
                       <a:solidFill>
                         <a:srgbClr val="D1D5DB"/>
@@ -3229,6 +3057,11 @@
                     </a:solidFill>
                   </a:tcPr>
                 </a:tc>
+                <a:extLst>
+                  <a:ext uri="{0D108BD9-81ED-4DB2-BD59-A6C34878D82A}">
+                    <a16:rowId xmlns:a16="http://schemas.microsoft.com/office/drawing/2014/main" val="10002"/>
+                  </a:ext>
+                </a:extLst>
               </a:tr>
               <a:tr h="777240">
                 <a:tc>
@@ -3236,7 +3069,7 @@
                     <a:bodyPr/>
                     <a:lstStyle/>
                     <a:p>
-                      <a:pPr algn="l" indent="0" marL="0">
+                      <a:pPr marL="0" indent="0" algn="l">
                         <a:buNone/>
                       </a:pPr>
                       <a:r>
@@ -3257,7 +3090,7 @@
                       </a:endParaRPr>
                     </a:p>
                   </a:txBody>
-                  <a:tcPr marL="91440" marR="91440" marT="45720" marB="45720" anchor="ctr">
+                  <a:tcPr anchor="ctr">
                     <a:lnL w="9525" cap="flat" cmpd="sng" algn="ctr">
                       <a:solidFill>
                         <a:srgbClr val="D1D5DB"/>
@@ -3304,7 +3137,7 @@
                     <a:bodyPr/>
                     <a:lstStyle/>
                     <a:p>
-                      <a:pPr algn="l" indent="0" marL="0">
+                      <a:pPr marL="0" indent="0" algn="l">
                         <a:buNone/>
                       </a:pPr>
                       <a:r>
@@ -3325,7 +3158,7 @@
                       </a:endParaRPr>
                     </a:p>
                     <a:p>
-                      <a:pPr algn="l" indent="0" marL="0">
+                      <a:pPr marL="0" indent="0" algn="l">
                         <a:buNone/>
                       </a:pPr>
                       <a:r>
@@ -3346,7 +3179,7 @@
                       </a:endParaRPr>
                     </a:p>
                   </a:txBody>
-                  <a:tcPr marL="91440" marR="91440" marT="45720" marB="45720" anchor="ctr">
+                  <a:tcPr anchor="ctr">
                     <a:lnL w="9525" cap="flat" cmpd="sng" algn="ctr">
                       <a:solidFill>
                         <a:srgbClr val="D1D5DB"/>
@@ -3393,7 +3226,7 @@
                     <a:bodyPr/>
                     <a:lstStyle/>
                     <a:p>
-                      <a:pPr algn="l" indent="0" marL="0">
+                      <a:pPr marL="0" indent="0" algn="l">
                         <a:buNone/>
                       </a:pPr>
                       <a:r>
@@ -3414,7 +3247,7 @@
                       </a:endParaRPr>
                     </a:p>
                     <a:p>
-                      <a:pPr algn="l" indent="0" marL="0">
+                      <a:pPr marL="0" indent="0" algn="l">
                         <a:buNone/>
                       </a:pPr>
                       <a:r>
@@ -3435,7 +3268,7 @@
                       </a:endParaRPr>
                     </a:p>
                   </a:txBody>
-                  <a:tcPr marL="91440" marR="91440" marT="45720" marB="45720" anchor="ctr">
+                  <a:tcPr anchor="ctr">
                     <a:lnL w="9525" cap="flat" cmpd="sng" algn="ctr">
                       <a:solidFill>
                         <a:srgbClr val="D1D5DB"/>
@@ -3477,6 +3310,11 @@
                     </a:solidFill>
                   </a:tcPr>
                 </a:tc>
+                <a:extLst>
+                  <a:ext uri="{0D108BD9-81ED-4DB2-BD59-A6C34878D82A}">
+                    <a16:rowId xmlns:a16="http://schemas.microsoft.com/office/drawing/2014/main" val="10003"/>
+                  </a:ext>
+                </a:extLst>
               </a:tr>
               <a:tr h="685800">
                 <a:tc>
@@ -3484,7 +3322,7 @@
                     <a:bodyPr/>
                     <a:lstStyle/>
                     <a:p>
-                      <a:pPr algn="l" indent="0" marL="0">
+                      <a:pPr marL="0" indent="0" algn="l">
                         <a:buNone/>
                       </a:pPr>
                       <a:r>
@@ -3505,7 +3343,7 @@
                       </a:endParaRPr>
                     </a:p>
                   </a:txBody>
-                  <a:tcPr marL="91440" marR="91440" marT="45720" marB="45720" anchor="ctr">
+                  <a:tcPr anchor="ctr">
                     <a:lnL w="9525" cap="flat" cmpd="sng" algn="ctr">
                       <a:solidFill>
                         <a:srgbClr val="D1D5DB"/>
@@ -3552,7 +3390,7 @@
                     <a:bodyPr/>
                     <a:lstStyle/>
                     <a:p>
-                      <a:pPr algn="l" indent="0" marL="0">
+                      <a:pPr marL="0" indent="0" algn="l">
                         <a:buNone/>
                       </a:pPr>
                       <a:r>
@@ -3573,7 +3411,7 @@
                       </a:endParaRPr>
                     </a:p>
                   </a:txBody>
-                  <a:tcPr marL="91440" marR="91440" marT="45720" marB="45720" anchor="ctr">
+                  <a:tcPr anchor="ctr">
                     <a:lnL w="9525" cap="flat" cmpd="sng" algn="ctr">
                       <a:solidFill>
                         <a:srgbClr val="D1D5DB"/>
@@ -3620,7 +3458,7 @@
                     <a:bodyPr/>
                     <a:lstStyle/>
                     <a:p>
-                      <a:pPr algn="l" indent="0" marL="0">
+                      <a:pPr marL="0" indent="0" algn="l">
                         <a:buNone/>
                       </a:pPr>
                       <a:r>
@@ -3641,7 +3479,7 @@
                       </a:endParaRPr>
                     </a:p>
                     <a:p>
-                      <a:pPr algn="l" indent="0" marL="0">
+                      <a:pPr marL="0" indent="0" algn="l">
                         <a:buNone/>
                       </a:pPr>
                       <a:r>
@@ -3662,7 +3500,7 @@
                       </a:endParaRPr>
                     </a:p>
                   </a:txBody>
-                  <a:tcPr marL="91440" marR="91440" marT="45720" marB="45720" anchor="ctr">
+                  <a:tcPr anchor="ctr">
                     <a:lnL w="9525" cap="flat" cmpd="sng" algn="ctr">
                       <a:solidFill>
                         <a:srgbClr val="D1D5DB"/>
@@ -3704,6 +3542,11 @@
                     </a:solidFill>
                   </a:tcPr>
                 </a:tc>
+                <a:extLst>
+                  <a:ext uri="{0D108BD9-81ED-4DB2-BD59-A6C34878D82A}">
+                    <a16:rowId xmlns:a16="http://schemas.microsoft.com/office/drawing/2014/main" val="10004"/>
+                  </a:ext>
+                </a:extLst>
               </a:tr>
             </a:tbl>
           </a:graphicData>
@@ -3730,7 +3573,7 @@
           <a:bodyPr wrap="square" rtlCol="0" anchor="ctr"/>
           <a:lstStyle/>
           <a:p>
-            <a:pPr indent="0" marL="0">
+            <a:pPr marL="0" indent="0">
               <a:buNone/>
             </a:pPr>
             <a:r>
@@ -3769,7 +3612,7 @@
           <a:bodyPr wrap="square" rtlCol="0" anchor="ctr"/>
           <a:lstStyle/>
           <a:p>
-            <a:pPr algn="r" indent="0" marL="0">
+            <a:pPr marL="0" indent="0" algn="r">
               <a:buNone/>
             </a:pPr>
             <a:r>
@@ -3808,7 +3651,7 @@
           <a:bodyPr wrap="square" rtlCol="0" anchor="ctr"/>
           <a:lstStyle/>
           <a:p>
-            <a:pPr algn="r" indent="0" marL="0">
+            <a:pPr marL="0" indent="0" algn="r">
               <a:buNone/>
             </a:pPr>
             <a:r>
@@ -3842,6 +3685,7 @@
         <a:solidFill>
           <a:srgbClr val="333333"/>
         </a:solidFill>
+        <a:effectLst/>
       </p:bgPr>
     </p:bg>
     <p:spTree>
@@ -3882,6 +3726,13 @@
             <a:prstDash val="solid"/>
           </a:ln>
         </p:spPr>
+        <p:txBody>
+          <a:bodyPr/>
+          <a:lstStyle/>
+          <a:p>
+            <a:endParaRPr lang="ja-JP" altLang="en-US"/>
+          </a:p>
+        </p:txBody>
       </p:sp>
       <p:sp>
         <p:nvSpPr>
@@ -3904,7 +3755,7 @@
           <a:bodyPr wrap="square" rtlCol="0" anchor="ctr"/>
           <a:lstStyle/>
           <a:p>
-            <a:pPr indent="0" marL="0">
+            <a:pPr marL="0" indent="0">
               <a:buNone/>
             </a:pPr>
             <a:r>
@@ -3943,7 +3794,7 @@
           <a:bodyPr wrap="square" rtlCol="0" anchor="ctr"/>
           <a:lstStyle/>
           <a:p>
-            <a:pPr indent="0" marL="0">
+            <a:pPr marL="0" indent="0">
               <a:buNone/>
             </a:pPr>
             <a:r>
@@ -3982,7 +3833,7 @@
           <a:bodyPr wrap="square" rtlCol="0" anchor="ctr"/>
           <a:lstStyle/>
           <a:p>
-            <a:pPr indent="0" marL="0">
+            <a:pPr marL="0" indent="0">
               <a:buNone/>
             </a:pPr>
             <a:r>
@@ -4021,7 +3872,7 @@
           <a:bodyPr wrap="square" rtlCol="0" anchor="ctr"/>
           <a:lstStyle/>
           <a:p>
-            <a:pPr indent="0" marL="0">
+            <a:pPr marL="0" indent="0">
               <a:buNone/>
             </a:pPr>
             <a:r>
@@ -4060,7 +3911,7 @@
           <a:bodyPr wrap="square" rtlCol="0" anchor="ctr"/>
           <a:lstStyle/>
           <a:p>
-            <a:pPr algn="r" indent="0" marL="0">
+            <a:pPr marL="0" indent="0" algn="r">
               <a:buNone/>
             </a:pPr>
             <a:r>
@@ -4094,6 +3945,7 @@
         <a:solidFill>
           <a:srgbClr val="FFFFFF"/>
         </a:solidFill>
+        <a:effectLst/>
       </p:bgPr>
     </p:bg>
     <p:spTree>
@@ -4134,6 +3986,13 @@
             <a:prstDash val="solid"/>
           </a:ln>
         </p:spPr>
+        <p:txBody>
+          <a:bodyPr/>
+          <a:lstStyle/>
+          <a:p>
+            <a:endParaRPr lang="ja-JP" altLang="en-US"/>
+          </a:p>
+        </p:txBody>
       </p:sp>
       <p:sp>
         <p:nvSpPr>
@@ -4156,7 +4015,7 @@
           <a:bodyPr wrap="square" rtlCol="0" anchor="ctr"/>
           <a:lstStyle/>
           <a:p>
-            <a:pPr indent="0" marL="0">
+            <a:pPr marL="0" indent="0">
               <a:buNone/>
             </a:pPr>
             <a:r>
@@ -4195,7 +4054,7 @@
           <a:bodyPr wrap="square" rtlCol="0" anchor="ctr"/>
           <a:lstStyle/>
           <a:p>
-            <a:pPr algn="r" indent="0" marL="0">
+            <a:pPr marL="0" indent="0" algn="r">
               <a:buNone/>
             </a:pPr>
             <a:r>
@@ -4237,6 +4096,13 @@
             <a:prstDash val="solid"/>
           </a:ln>
         </p:spPr>
+        <p:txBody>
+          <a:bodyPr/>
+          <a:lstStyle/>
+          <a:p>
+            <a:endParaRPr lang="ja-JP" altLang="en-US"/>
+          </a:p>
+        </p:txBody>
       </p:sp>
       <p:sp>
         <p:nvSpPr>
@@ -4264,6 +4130,13 @@
             <a:prstDash val="solid"/>
           </a:ln>
         </p:spPr>
+        <p:txBody>
+          <a:bodyPr/>
+          <a:lstStyle/>
+          <a:p>
+            <a:endParaRPr lang="ja-JP" altLang="en-US"/>
+          </a:p>
+        </p:txBody>
       </p:sp>
       <p:sp>
         <p:nvSpPr>
@@ -4284,6 +4157,13 @@
           </a:solidFill>
           <a:ln/>
         </p:spPr>
+        <p:txBody>
+          <a:bodyPr/>
+          <a:lstStyle/>
+          <a:p>
+            <a:endParaRPr lang="ja-JP" altLang="en-US"/>
+          </a:p>
+        </p:txBody>
       </p:sp>
       <p:sp>
         <p:nvSpPr>
@@ -4306,7 +4186,7 @@
           <a:bodyPr wrap="square" rtlCol="0" anchor="ctr"/>
           <a:lstStyle/>
           <a:p>
-            <a:pPr algn="ctr" indent="0" marL="0">
+            <a:pPr marL="0" indent="0" algn="ctr">
               <a:buNone/>
             </a:pPr>
             <a:r>
@@ -4345,7 +4225,7 @@
           <a:bodyPr wrap="square" rtlCol="0" anchor="ctr"/>
           <a:lstStyle/>
           <a:p>
-            <a:pPr indent="0" marL="0">
+            <a:pPr marL="0" indent="0">
               <a:buNone/>
             </a:pPr>
             <a:r>
@@ -4384,7 +4264,7 @@
           <a:bodyPr wrap="square" rtlCol="0" anchor="t"/>
           <a:lstStyle/>
           <a:p>
-            <a:pPr indent="0" marL="0">
+            <a:pPr marL="0" indent="0">
               <a:buNone/>
             </a:pPr>
             <a:r>
@@ -4401,7 +4281,7 @@
             <a:endParaRPr lang="en-US" sz="1050" dirty="0"/>
           </a:p>
           <a:p>
-            <a:pPr indent="0" marL="0">
+            <a:pPr marL="0" indent="0">
               <a:buNone/>
             </a:pPr>
             <a:r>
@@ -4445,6 +4325,13 @@
             <a:prstDash val="solid"/>
           </a:ln>
         </p:spPr>
+        <p:txBody>
+          <a:bodyPr/>
+          <a:lstStyle/>
+          <a:p>
+            <a:endParaRPr lang="ja-JP" altLang="en-US"/>
+          </a:p>
+        </p:txBody>
       </p:sp>
       <p:sp>
         <p:nvSpPr>
@@ -4465,6 +4352,13 @@
           </a:solidFill>
           <a:ln/>
         </p:spPr>
+        <p:txBody>
+          <a:bodyPr/>
+          <a:lstStyle/>
+          <a:p>
+            <a:endParaRPr lang="ja-JP" altLang="en-US"/>
+          </a:p>
+        </p:txBody>
       </p:sp>
       <p:sp>
         <p:nvSpPr>
@@ -4487,7 +4381,7 @@
           <a:bodyPr wrap="square" rtlCol="0" anchor="ctr"/>
           <a:lstStyle/>
           <a:p>
-            <a:pPr algn="ctr" indent="0" marL="0">
+            <a:pPr marL="0" indent="0" algn="ctr">
               <a:buNone/>
             </a:pPr>
             <a:r>
@@ -4526,7 +4420,7 @@
           <a:bodyPr wrap="square" rtlCol="0" anchor="ctr"/>
           <a:lstStyle/>
           <a:p>
-            <a:pPr indent="0" marL="0">
+            <a:pPr marL="0" indent="0">
               <a:buNone/>
             </a:pPr>
             <a:r>
@@ -4565,7 +4459,7 @@
           <a:bodyPr wrap="square" rtlCol="0" anchor="t"/>
           <a:lstStyle/>
           <a:p>
-            <a:pPr indent="0" marL="0">
+            <a:pPr marL="0" indent="0">
               <a:buNone/>
             </a:pPr>
             <a:r>
@@ -4582,7 +4476,7 @@
             <a:endParaRPr lang="en-US" sz="1050" dirty="0"/>
           </a:p>
           <a:p>
-            <a:pPr indent="0" marL="0">
+            <a:pPr marL="0" indent="0">
               <a:buNone/>
             </a:pPr>
             <a:r>
@@ -4626,6 +4520,13 @@
             <a:prstDash val="solid"/>
           </a:ln>
         </p:spPr>
+        <p:txBody>
+          <a:bodyPr/>
+          <a:lstStyle/>
+          <a:p>
+            <a:endParaRPr lang="ja-JP" altLang="en-US"/>
+          </a:p>
+        </p:txBody>
       </p:sp>
       <p:sp>
         <p:nvSpPr>
@@ -4646,6 +4547,13 @@
           </a:solidFill>
           <a:ln/>
         </p:spPr>
+        <p:txBody>
+          <a:bodyPr/>
+          <a:lstStyle/>
+          <a:p>
+            <a:endParaRPr lang="ja-JP" altLang="en-US"/>
+          </a:p>
+        </p:txBody>
       </p:sp>
       <p:sp>
         <p:nvSpPr>
@@ -4668,7 +4576,7 @@
           <a:bodyPr wrap="square" rtlCol="0" anchor="ctr"/>
           <a:lstStyle/>
           <a:p>
-            <a:pPr algn="ctr" indent="0" marL="0">
+            <a:pPr marL="0" indent="0" algn="ctr">
               <a:buNone/>
             </a:pPr>
             <a:r>
@@ -4707,7 +4615,7 @@
           <a:bodyPr wrap="square" rtlCol="0" anchor="ctr"/>
           <a:lstStyle/>
           <a:p>
-            <a:pPr indent="0" marL="0">
+            <a:pPr marL="0" indent="0">
               <a:buNone/>
             </a:pPr>
             <a:r>
@@ -4746,7 +4654,7 @@
           <a:bodyPr wrap="square" rtlCol="0" anchor="t"/>
           <a:lstStyle/>
           <a:p>
-            <a:pPr indent="0" marL="0">
+            <a:pPr marL="0" indent="0">
               <a:buNone/>
             </a:pPr>
             <a:r>
@@ -4763,7 +4671,7 @@
             <a:endParaRPr lang="en-US" sz="1050" dirty="0"/>
           </a:p>
           <a:p>
-            <a:pPr indent="0" marL="0">
+            <a:pPr marL="0" indent="0">
               <a:buNone/>
             </a:pPr>
             <a:r>
@@ -4807,6 +4715,13 @@
             <a:prstDash val="solid"/>
           </a:ln>
         </p:spPr>
+        <p:txBody>
+          <a:bodyPr/>
+          <a:lstStyle/>
+          <a:p>
+            <a:endParaRPr lang="ja-JP" altLang="en-US"/>
+          </a:p>
+        </p:txBody>
       </p:sp>
       <p:sp>
         <p:nvSpPr>
@@ -4827,6 +4742,13 @@
           </a:solidFill>
           <a:ln/>
         </p:spPr>
+        <p:txBody>
+          <a:bodyPr/>
+          <a:lstStyle/>
+          <a:p>
+            <a:endParaRPr lang="ja-JP" altLang="en-US"/>
+          </a:p>
+        </p:txBody>
       </p:sp>
       <p:sp>
         <p:nvSpPr>
@@ -4849,7 +4771,7 @@
           <a:bodyPr wrap="square" rtlCol="0" anchor="ctr"/>
           <a:lstStyle/>
           <a:p>
-            <a:pPr algn="ctr" indent="0" marL="0">
+            <a:pPr marL="0" indent="0" algn="ctr">
               <a:buNone/>
             </a:pPr>
             <a:r>
@@ -4888,7 +4810,7 @@
           <a:bodyPr wrap="square" rtlCol="0" anchor="ctr"/>
           <a:lstStyle/>
           <a:p>
-            <a:pPr indent="0" marL="0">
+            <a:pPr marL="0" indent="0">
               <a:buNone/>
             </a:pPr>
             <a:r>
@@ -4927,7 +4849,7 @@
           <a:bodyPr wrap="square" rtlCol="0" anchor="t"/>
           <a:lstStyle/>
           <a:p>
-            <a:pPr indent="0" marL="0">
+            <a:pPr marL="0" indent="0">
               <a:buNone/>
             </a:pPr>
             <a:r>
@@ -4944,7 +4866,7 @@
             <a:endParaRPr lang="en-US" sz="1050" dirty="0"/>
           </a:p>
           <a:p>
-            <a:pPr indent="0" marL="0">
+            <a:pPr marL="0" indent="0">
               <a:buNone/>
             </a:pPr>
             <a:r>
@@ -4983,7 +4905,7 @@
           <a:bodyPr wrap="square" rtlCol="0" anchor="ctr"/>
           <a:lstStyle/>
           <a:p>
-            <a:pPr indent="0" marL="0">
+            <a:pPr marL="0" indent="0">
               <a:buNone/>
             </a:pPr>
             <a:r>
@@ -5022,7 +4944,7 @@
           <a:bodyPr wrap="square" rtlCol="0" anchor="ctr"/>
           <a:lstStyle/>
           <a:p>
-            <a:pPr algn="r" indent="0" marL="0">
+            <a:pPr marL="0" indent="0" algn="r">
               <a:buNone/>
             </a:pPr>
             <a:r>
@@ -5061,7 +4983,7 @@
           <a:bodyPr wrap="square" rtlCol="0" anchor="ctr"/>
           <a:lstStyle/>
           <a:p>
-            <a:pPr algn="r" indent="0" marL="0">
+            <a:pPr marL="0" indent="0" algn="r">
               <a:buNone/>
             </a:pPr>
             <a:r>
@@ -5095,6 +5017,7 @@
         <a:solidFill>
           <a:srgbClr val="FFFFFF"/>
         </a:solidFill>
+        <a:effectLst/>
       </p:bgPr>
     </p:bg>
     <p:spTree>
@@ -5135,6 +5058,13 @@
             <a:prstDash val="solid"/>
           </a:ln>
         </p:spPr>
+        <p:txBody>
+          <a:bodyPr/>
+          <a:lstStyle/>
+          <a:p>
+            <a:endParaRPr lang="ja-JP" altLang="en-US"/>
+          </a:p>
+        </p:txBody>
       </p:sp>
       <p:sp>
         <p:nvSpPr>
@@ -5157,7 +5087,7 @@
           <a:bodyPr wrap="square" rtlCol="0" anchor="ctr"/>
           <a:lstStyle/>
           <a:p>
-            <a:pPr indent="0" marL="0">
+            <a:pPr marL="0" indent="0">
               <a:buNone/>
             </a:pPr>
             <a:r>
@@ -5196,7 +5126,7 @@
           <a:bodyPr wrap="square" rtlCol="0" anchor="ctr"/>
           <a:lstStyle/>
           <a:p>
-            <a:pPr algn="r" indent="0" marL="0">
+            <a:pPr marL="0" indent="0" algn="r">
               <a:buNone/>
             </a:pPr>
             <a:r>
@@ -5238,6 +5168,13 @@
             <a:prstDash val="solid"/>
           </a:ln>
         </p:spPr>
+        <p:txBody>
+          <a:bodyPr/>
+          <a:lstStyle/>
+          <a:p>
+            <a:endParaRPr lang="ja-JP" altLang="en-US"/>
+          </a:p>
+        </p:txBody>
       </p:sp>
       <p:graphicFrame>
         <p:nvGraphicFramePr>
@@ -5262,9 +5199,27 @@
             <a:tbl>
               <a:tblPr/>
               <a:tblGrid>
-                <a:gridCol w="3291840"/>
-                <a:gridCol w="3886200"/>
-                <a:gridCol w="3886200"/>
+                <a:gridCol w="3291840">
+                  <a:extLst>
+                    <a:ext uri="{9D8B030D-6E8A-4147-A177-3AD203B41FA5}">
+                      <a16:colId xmlns:a16="http://schemas.microsoft.com/office/drawing/2014/main" val="20000"/>
+                    </a:ext>
+                  </a:extLst>
+                </a:gridCol>
+                <a:gridCol w="3886200">
+                  <a:extLst>
+                    <a:ext uri="{9D8B030D-6E8A-4147-A177-3AD203B41FA5}">
+                      <a16:colId xmlns:a16="http://schemas.microsoft.com/office/drawing/2014/main" val="20001"/>
+                    </a:ext>
+                  </a:extLst>
+                </a:gridCol>
+                <a:gridCol w="3886200">
+                  <a:extLst>
+                    <a:ext uri="{9D8B030D-6E8A-4147-A177-3AD203B41FA5}">
+                      <a16:colId xmlns:a16="http://schemas.microsoft.com/office/drawing/2014/main" val="20002"/>
+                    </a:ext>
+                  </a:extLst>
+                </a:gridCol>
               </a:tblGrid>
               <a:tr h="685800">
                 <a:tc>
@@ -5272,7 +5227,7 @@
                     <a:bodyPr/>
                     <a:lstStyle/>
                     <a:p>
-                      <a:pPr algn="ctr" indent="0" marL="0">
+                      <a:pPr marL="0" indent="0" algn="ctr">
                         <a:buNone/>
                       </a:pPr>
                       <a:r>
@@ -5293,7 +5248,7 @@
                       </a:endParaRPr>
                     </a:p>
                   </a:txBody>
-                  <a:tcPr marL="91440" marR="91440" marT="45720" marB="45720" anchor="ctr">
+                  <a:tcPr anchor="ctr">
                     <a:lnL w="9525" cap="flat" cmpd="sng" algn="ctr">
                       <a:solidFill>
                         <a:srgbClr val="D1D5DB"/>
@@ -5340,7 +5295,7 @@
                     <a:bodyPr/>
                     <a:lstStyle/>
                     <a:p>
-                      <a:pPr algn="ctr" indent="0" marL="0">
+                      <a:pPr marL="0" indent="0" algn="ctr">
                         <a:buNone/>
                       </a:pPr>
                       <a:r>
@@ -5361,7 +5316,7 @@
                       </a:endParaRPr>
                     </a:p>
                   </a:txBody>
-                  <a:tcPr marL="91440" marR="91440" marT="45720" marB="45720" anchor="ctr">
+                  <a:tcPr anchor="ctr">
                     <a:lnL w="9525" cap="flat" cmpd="sng" algn="ctr">
                       <a:solidFill>
                         <a:srgbClr val="D1D5DB"/>
@@ -5408,7 +5363,7 @@
                     <a:bodyPr/>
                     <a:lstStyle/>
                     <a:p>
-                      <a:pPr algn="ctr" indent="0" marL="0">
+                      <a:pPr marL="0" indent="0" algn="ctr">
                         <a:buNone/>
                       </a:pPr>
                       <a:r>
@@ -5429,7 +5384,7 @@
                       </a:endParaRPr>
                     </a:p>
                   </a:txBody>
-                  <a:tcPr marL="91440" marR="91440" marT="45720" marB="45720" anchor="ctr">
+                  <a:tcPr anchor="ctr">
                     <a:lnL w="9525" cap="flat" cmpd="sng" algn="ctr">
                       <a:solidFill>
                         <a:srgbClr val="D1D5DB"/>
@@ -5471,6 +5426,11 @@
                     </a:solidFill>
                   </a:tcPr>
                 </a:tc>
+                <a:extLst>
+                  <a:ext uri="{0D108BD9-81ED-4DB2-BD59-A6C34878D82A}">
+                    <a16:rowId xmlns:a16="http://schemas.microsoft.com/office/drawing/2014/main" val="10000"/>
+                  </a:ext>
+                </a:extLst>
               </a:tr>
               <a:tr h="1005840">
                 <a:tc>
@@ -5478,7 +5438,7 @@
                     <a:bodyPr/>
                     <a:lstStyle/>
                     <a:p>
-                      <a:pPr algn="l" indent="0" marL="0">
+                      <a:pPr marL="0" indent="0" algn="l">
                         <a:buNone/>
                       </a:pPr>
                       <a:r>
@@ -5499,7 +5459,7 @@
                       </a:endParaRPr>
                     </a:p>
                     <a:p>
-                      <a:pPr algn="l" indent="0" marL="0">
+                      <a:pPr marL="0" indent="0" algn="l">
                         <a:buNone/>
                       </a:pPr>
                       <a:r>
@@ -5520,7 +5480,7 @@
                       </a:endParaRPr>
                     </a:p>
                   </a:txBody>
-                  <a:tcPr marL="91440" marR="91440" marT="45720" marB="45720" anchor="ctr">
+                  <a:tcPr anchor="ctr">
                     <a:lnL w="9525" cap="flat" cmpd="sng" algn="ctr">
                       <a:solidFill>
                         <a:srgbClr val="D1D5DB"/>
@@ -5567,7 +5527,7 @@
                     <a:bodyPr/>
                     <a:lstStyle/>
                     <a:p>
-                      <a:pPr algn="l" indent="0" marL="0">
+                      <a:pPr marL="0" indent="0" algn="l">
                         <a:buNone/>
                       </a:pPr>
                       <a:r>
@@ -5588,7 +5548,7 @@
                       </a:endParaRPr>
                     </a:p>
                     <a:p>
-                      <a:pPr algn="l" indent="0" marL="0">
+                      <a:pPr marL="0" indent="0" algn="l">
                         <a:buNone/>
                       </a:pPr>
                       <a:r>
@@ -5609,7 +5569,7 @@
                       </a:endParaRPr>
                     </a:p>
                   </a:txBody>
-                  <a:tcPr marL="91440" marR="91440" marT="45720" marB="45720" anchor="ctr">
+                  <a:tcPr anchor="ctr">
                     <a:lnL w="9525" cap="flat" cmpd="sng" algn="ctr">
                       <a:solidFill>
                         <a:srgbClr val="D1D5DB"/>
@@ -5656,7 +5616,7 @@
                     <a:bodyPr/>
                     <a:lstStyle/>
                     <a:p>
-                      <a:pPr algn="l" indent="0" marL="0">
+                      <a:pPr marL="0" indent="0" algn="l">
                         <a:buNone/>
                       </a:pPr>
                       <a:r>
@@ -5677,7 +5637,7 @@
                       </a:endParaRPr>
                     </a:p>
                     <a:p>
-                      <a:pPr algn="l" indent="0" marL="0">
+                      <a:pPr marL="0" indent="0" algn="l">
                         <a:buNone/>
                       </a:pPr>
                       <a:r>
@@ -5698,7 +5658,7 @@
                       </a:endParaRPr>
                     </a:p>
                   </a:txBody>
-                  <a:tcPr marL="91440" marR="91440" marT="45720" marB="45720" anchor="ctr">
+                  <a:tcPr anchor="ctr">
                     <a:lnL w="9525" cap="flat" cmpd="sng" algn="ctr">
                       <a:solidFill>
                         <a:srgbClr val="D1D5DB"/>
@@ -5740,6 +5700,11 @@
                     </a:solidFill>
                   </a:tcPr>
                 </a:tc>
+                <a:extLst>
+                  <a:ext uri="{0D108BD9-81ED-4DB2-BD59-A6C34878D82A}">
+                    <a16:rowId xmlns:a16="http://schemas.microsoft.com/office/drawing/2014/main" val="10001"/>
+                  </a:ext>
+                </a:extLst>
               </a:tr>
               <a:tr h="1005840">
                 <a:tc>
@@ -5747,7 +5712,7 @@
                     <a:bodyPr/>
                     <a:lstStyle/>
                     <a:p>
-                      <a:pPr algn="l" indent="0" marL="0">
+                      <a:pPr marL="0" indent="0" algn="l">
                         <a:buNone/>
                       </a:pPr>
                       <a:r>
@@ -5768,7 +5733,7 @@
                       </a:endParaRPr>
                     </a:p>
                     <a:p>
-                      <a:pPr algn="l" indent="0" marL="0">
+                      <a:pPr marL="0" indent="0" algn="l">
                         <a:buNone/>
                       </a:pPr>
                       <a:r>
@@ -5789,7 +5754,7 @@
                       </a:endParaRPr>
                     </a:p>
                   </a:txBody>
-                  <a:tcPr marL="91440" marR="91440" marT="45720" marB="45720" anchor="ctr">
+                  <a:tcPr anchor="ctr">
                     <a:lnL w="9525" cap="flat" cmpd="sng" algn="ctr">
                       <a:solidFill>
                         <a:srgbClr val="D1D5DB"/>
@@ -5836,7 +5801,7 @@
                     <a:bodyPr/>
                     <a:lstStyle/>
                     <a:p>
-                      <a:pPr algn="l" indent="0" marL="0">
+                      <a:pPr marL="0" indent="0" algn="l">
                         <a:buNone/>
                       </a:pPr>
                       <a:r>
@@ -5857,7 +5822,7 @@
                       </a:endParaRPr>
                     </a:p>
                     <a:p>
-                      <a:pPr algn="l" indent="0" marL="0">
+                      <a:pPr marL="0" indent="0" algn="l">
                         <a:buNone/>
                       </a:pPr>
                       <a:r>
@@ -5878,7 +5843,7 @@
                       </a:endParaRPr>
                     </a:p>
                   </a:txBody>
-                  <a:tcPr marL="91440" marR="91440" marT="45720" marB="45720" anchor="ctr">
+                  <a:tcPr anchor="ctr">
                     <a:lnL w="9525" cap="flat" cmpd="sng" algn="ctr">
                       <a:solidFill>
                         <a:srgbClr val="D1D5DB"/>
@@ -5925,7 +5890,7 @@
                     <a:bodyPr/>
                     <a:lstStyle/>
                     <a:p>
-                      <a:pPr algn="l" indent="0" marL="0">
+                      <a:pPr marL="0" indent="0" algn="l">
                         <a:buNone/>
                       </a:pPr>
                       <a:r>
@@ -5946,7 +5911,7 @@
                       </a:endParaRPr>
                     </a:p>
                     <a:p>
-                      <a:pPr algn="l" indent="0" marL="0">
+                      <a:pPr marL="0" indent="0" algn="l">
                         <a:buNone/>
                       </a:pPr>
                       <a:r>
@@ -5967,7 +5932,7 @@
                       </a:endParaRPr>
                     </a:p>
                   </a:txBody>
-                  <a:tcPr marL="91440" marR="91440" marT="45720" marB="45720" anchor="ctr">
+                  <a:tcPr anchor="ctr">
                     <a:lnL w="9525" cap="flat" cmpd="sng" algn="ctr">
                       <a:solidFill>
                         <a:srgbClr val="D1D5DB"/>
@@ -6009,6 +5974,11 @@
                     </a:solidFill>
                   </a:tcPr>
                 </a:tc>
+                <a:extLst>
+                  <a:ext uri="{0D108BD9-81ED-4DB2-BD59-A6C34878D82A}">
+                    <a16:rowId xmlns:a16="http://schemas.microsoft.com/office/drawing/2014/main" val="10002"/>
+                  </a:ext>
+                </a:extLst>
               </a:tr>
               <a:tr h="914400">
                 <a:tc>
@@ -6016,7 +5986,7 @@
                     <a:bodyPr/>
                     <a:lstStyle/>
                     <a:p>
-                      <a:pPr algn="l" indent="0" marL="0">
+                      <a:pPr marL="0" indent="0" algn="l">
                         <a:buNone/>
                       </a:pPr>
                       <a:r>
@@ -6037,7 +6007,7 @@
                       </a:endParaRPr>
                     </a:p>
                   </a:txBody>
-                  <a:tcPr marL="91440" marR="91440" marT="45720" marB="45720" anchor="ctr">
+                  <a:tcPr anchor="ctr">
                     <a:lnL w="9525" cap="flat" cmpd="sng" algn="ctr">
                       <a:solidFill>
                         <a:srgbClr val="D1D5DB"/>
@@ -6084,7 +6054,7 @@
                     <a:bodyPr/>
                     <a:lstStyle/>
                     <a:p>
-                      <a:pPr algn="l" indent="0" marL="0">
+                      <a:pPr marL="0" indent="0" algn="l">
                         <a:buNone/>
                       </a:pPr>
                       <a:r>
@@ -6105,7 +6075,7 @@
                       </a:endParaRPr>
                     </a:p>
                     <a:p>
-                      <a:pPr algn="l" indent="0" marL="0">
+                      <a:pPr marL="0" indent="0" algn="l">
                         <a:buNone/>
                       </a:pPr>
                       <a:r>
@@ -6126,7 +6096,7 @@
                       </a:endParaRPr>
                     </a:p>
                   </a:txBody>
-                  <a:tcPr marL="91440" marR="91440" marT="45720" marB="45720" anchor="ctr">
+                  <a:tcPr anchor="ctr">
                     <a:lnL w="9525" cap="flat" cmpd="sng" algn="ctr">
                       <a:solidFill>
                         <a:srgbClr val="D1D5DB"/>
@@ -6173,7 +6143,7 @@
                     <a:bodyPr/>
                     <a:lstStyle/>
                     <a:p>
-                      <a:pPr algn="l" indent="0" marL="0">
+                      <a:pPr marL="0" indent="0" algn="l">
                         <a:buNone/>
                       </a:pPr>
                       <a:r>
@@ -6194,7 +6164,7 @@
                       </a:endParaRPr>
                     </a:p>
                     <a:p>
-                      <a:pPr algn="l" indent="0" marL="0">
+                      <a:pPr marL="0" indent="0" algn="l">
                         <a:buNone/>
                       </a:pPr>
                       <a:r>
@@ -6215,7 +6185,7 @@
                       </a:endParaRPr>
                     </a:p>
                   </a:txBody>
-                  <a:tcPr marL="91440" marR="91440" marT="45720" marB="45720" anchor="ctr">
+                  <a:tcPr anchor="ctr">
                     <a:lnL w="9525" cap="flat" cmpd="sng" algn="ctr">
                       <a:solidFill>
                         <a:srgbClr val="D1D5DB"/>
@@ -6257,6 +6227,11 @@
                     </a:solidFill>
                   </a:tcPr>
                 </a:tc>
+                <a:extLst>
+                  <a:ext uri="{0D108BD9-81ED-4DB2-BD59-A6C34878D82A}">
+                    <a16:rowId xmlns:a16="http://schemas.microsoft.com/office/drawing/2014/main" val="10003"/>
+                  </a:ext>
+                </a:extLst>
               </a:tr>
             </a:tbl>
           </a:graphicData>
@@ -6283,7 +6258,7 @@
           <a:bodyPr wrap="square" rtlCol="0" anchor="ctr"/>
           <a:lstStyle/>
           <a:p>
-            <a:pPr indent="0" marL="0">
+            <a:pPr marL="0" indent="0">
               <a:buNone/>
             </a:pPr>
             <a:r>
@@ -6322,7 +6297,7 @@
           <a:bodyPr wrap="square" rtlCol="0" anchor="ctr"/>
           <a:lstStyle/>
           <a:p>
-            <a:pPr indent="0" marL="0">
+            <a:pPr marL="0" indent="0">
               <a:buNone/>
             </a:pPr>
             <a:r>
@@ -6361,7 +6336,7 @@
           <a:bodyPr wrap="square" rtlCol="0" anchor="ctr"/>
           <a:lstStyle/>
           <a:p>
-            <a:pPr algn="r" indent="0" marL="0">
+            <a:pPr marL="0" indent="0" algn="r">
               <a:buNone/>
             </a:pPr>
             <a:r>
@@ -6400,7 +6375,7 @@
           <a:bodyPr wrap="square" rtlCol="0" anchor="ctr"/>
           <a:lstStyle/>
           <a:p>
-            <a:pPr algn="r" indent="0" marL="0">
+            <a:pPr marL="0" indent="0" algn="r">
               <a:buNone/>
             </a:pPr>
             <a:r>
@@ -6434,6 +6409,7 @@
         <a:solidFill>
           <a:srgbClr val="FFFFFF"/>
         </a:solidFill>
+        <a:effectLst/>
       </p:bgPr>
     </p:bg>
     <p:spTree>
@@ -6474,6 +6450,13 @@
             <a:prstDash val="solid"/>
           </a:ln>
         </p:spPr>
+        <p:txBody>
+          <a:bodyPr/>
+          <a:lstStyle/>
+          <a:p>
+            <a:endParaRPr lang="ja-JP" altLang="en-US"/>
+          </a:p>
+        </p:txBody>
       </p:sp>
       <p:sp>
         <p:nvSpPr>
@@ -6496,7 +6479,7 @@
           <a:bodyPr wrap="square" rtlCol="0" anchor="ctr"/>
           <a:lstStyle/>
           <a:p>
-            <a:pPr indent="0" marL="0">
+            <a:pPr marL="0" indent="0">
               <a:buNone/>
             </a:pPr>
             <a:r>
@@ -6535,7 +6518,7 @@
           <a:bodyPr wrap="square" rtlCol="0" anchor="ctr"/>
           <a:lstStyle/>
           <a:p>
-            <a:pPr algn="r" indent="0" marL="0">
+            <a:pPr marL="0" indent="0" algn="r">
               <a:buNone/>
             </a:pPr>
             <a:r>
@@ -6577,6 +6560,13 @@
             <a:prstDash val="solid"/>
           </a:ln>
         </p:spPr>
+        <p:txBody>
+          <a:bodyPr/>
+          <a:lstStyle/>
+          <a:p>
+            <a:endParaRPr lang="ja-JP" altLang="en-US"/>
+          </a:p>
+        </p:txBody>
       </p:sp>
       <p:sp>
         <p:nvSpPr>
@@ -6604,6 +6594,13 @@
             <a:prstDash val="solid"/>
           </a:ln>
         </p:spPr>
+        <p:txBody>
+          <a:bodyPr/>
+          <a:lstStyle/>
+          <a:p>
+            <a:endParaRPr lang="ja-JP" altLang="en-US"/>
+          </a:p>
+        </p:txBody>
       </p:sp>
       <p:sp>
         <p:nvSpPr>
@@ -6626,7 +6623,7 @@
           <a:bodyPr wrap="square" rtlCol="0" anchor="ctr"/>
           <a:lstStyle/>
           <a:p>
-            <a:pPr indent="0" marL="0">
+            <a:pPr marL="0" indent="0">
               <a:buNone/>
             </a:pPr>
             <a:r>
@@ -6750,7 +6747,7 @@
           <a:bodyPr wrap="square" rtlCol="0" anchor="ctr"/>
           <a:lstStyle/>
           <a:p>
-            <a:pPr indent="0" marL="0">
+            <a:pPr marL="0" indent="0">
               <a:buNone/>
             </a:pPr>
             <a:r>
@@ -6794,6 +6791,13 @@
             <a:prstDash val="solid"/>
           </a:ln>
         </p:spPr>
+        <p:txBody>
+          <a:bodyPr/>
+          <a:lstStyle/>
+          <a:p>
+            <a:endParaRPr lang="ja-JP" altLang="en-US"/>
+          </a:p>
+        </p:txBody>
       </p:sp>
       <p:sp>
         <p:nvSpPr>
@@ -6816,7 +6820,7 @@
           <a:bodyPr wrap="square" rtlCol="0" anchor="ctr"/>
           <a:lstStyle/>
           <a:p>
-            <a:pPr indent="0" marL="0">
+            <a:pPr marL="0" indent="0">
               <a:buNone/>
             </a:pPr>
             <a:r>
@@ -6860,6 +6864,13 @@
             <a:prstDash val="solid"/>
           </a:ln>
         </p:spPr>
+        <p:txBody>
+          <a:bodyPr/>
+          <a:lstStyle/>
+          <a:p>
+            <a:endParaRPr lang="ja-JP" altLang="en-US"/>
+          </a:p>
+        </p:txBody>
       </p:sp>
       <p:sp>
         <p:nvSpPr>
@@ -6882,7 +6893,7 @@
           <a:bodyPr wrap="square" rtlCol="0" anchor="ctr"/>
           <a:lstStyle/>
           <a:p>
-            <a:pPr indent="0" marL="0">
+            <a:pPr marL="0" indent="0">
               <a:buNone/>
             </a:pPr>
             <a:r>
@@ -6926,6 +6937,13 @@
             <a:prstDash val="solid"/>
           </a:ln>
         </p:spPr>
+        <p:txBody>
+          <a:bodyPr/>
+          <a:lstStyle/>
+          <a:p>
+            <a:endParaRPr lang="ja-JP" altLang="en-US"/>
+          </a:p>
+        </p:txBody>
       </p:sp>
       <p:sp>
         <p:nvSpPr>
@@ -6948,7 +6966,7 @@
           <a:bodyPr wrap="square" rtlCol="0" anchor="ctr"/>
           <a:lstStyle/>
           <a:p>
-            <a:pPr indent="0" marL="0">
+            <a:pPr marL="0" indent="0">
               <a:buNone/>
             </a:pPr>
             <a:r>
@@ -6987,7 +7005,7 @@
           <a:bodyPr wrap="square" rtlCol="0" anchor="ctr"/>
           <a:lstStyle/>
           <a:p>
-            <a:pPr indent="0" marL="0">
+            <a:pPr marL="0" indent="0">
               <a:buNone/>
             </a:pPr>
             <a:r>
@@ -7026,7 +7044,7 @@
           <a:bodyPr wrap="square" rtlCol="0" anchor="ctr"/>
           <a:lstStyle/>
           <a:p>
-            <a:pPr indent="0" marL="0">
+            <a:pPr marL="0" indent="0">
               <a:buNone/>
             </a:pPr>
             <a:r>
@@ -7065,7 +7083,7 @@
           <a:bodyPr wrap="square" rtlCol="0" anchor="ctr"/>
           <a:lstStyle/>
           <a:p>
-            <a:pPr algn="r" indent="0" marL="0">
+            <a:pPr marL="0" indent="0" algn="r">
               <a:buNone/>
             </a:pPr>
             <a:r>
@@ -7104,7 +7122,7 @@
           <a:bodyPr wrap="square" rtlCol="0" anchor="ctr"/>
           <a:lstStyle/>
           <a:p>
-            <a:pPr algn="r" indent="0" marL="0">
+            <a:pPr marL="0" indent="0" algn="r">
               <a:buNone/>
             </a:pPr>
             <a:r>
@@ -7138,6 +7156,7 @@
         <a:solidFill>
           <a:srgbClr val="FFFFFF"/>
         </a:solidFill>
+        <a:effectLst/>
       </p:bgPr>
     </p:bg>
     <p:spTree>
@@ -7178,6 +7197,13 @@
             <a:prstDash val="solid"/>
           </a:ln>
         </p:spPr>
+        <p:txBody>
+          <a:bodyPr/>
+          <a:lstStyle/>
+          <a:p>
+            <a:endParaRPr lang="ja-JP" altLang="en-US"/>
+          </a:p>
+        </p:txBody>
       </p:sp>
       <p:sp>
         <p:nvSpPr>
@@ -7200,7 +7226,7 @@
           <a:bodyPr wrap="square" rtlCol="0" anchor="ctr"/>
           <a:lstStyle/>
           <a:p>
-            <a:pPr indent="0" marL="0">
+            <a:pPr marL="0" indent="0">
               <a:buNone/>
             </a:pPr>
             <a:r>
@@ -7239,7 +7265,7 @@
           <a:bodyPr wrap="square" rtlCol="0" anchor="ctr"/>
           <a:lstStyle/>
           <a:p>
-            <a:pPr algn="r" indent="0" marL="0">
+            <a:pPr marL="0" indent="0" algn="r">
               <a:buNone/>
             </a:pPr>
             <a:r>
@@ -7281,6 +7307,13 @@
             <a:prstDash val="solid"/>
           </a:ln>
         </p:spPr>
+        <p:txBody>
+          <a:bodyPr/>
+          <a:lstStyle/>
+          <a:p>
+            <a:endParaRPr lang="ja-JP" altLang="en-US"/>
+          </a:p>
+        </p:txBody>
       </p:sp>
       <p:sp>
         <p:nvSpPr>
@@ -7308,6 +7341,13 @@
             <a:prstDash val="solid"/>
           </a:ln>
         </p:spPr>
+        <p:txBody>
+          <a:bodyPr/>
+          <a:lstStyle/>
+          <a:p>
+            <a:endParaRPr lang="ja-JP" altLang="en-US"/>
+          </a:p>
+        </p:txBody>
       </p:sp>
       <p:sp>
         <p:nvSpPr>
@@ -7328,6 +7368,13 @@
           </a:solidFill>
           <a:ln/>
         </p:spPr>
+        <p:txBody>
+          <a:bodyPr/>
+          <a:lstStyle/>
+          <a:p>
+            <a:endParaRPr lang="ja-JP" altLang="en-US"/>
+          </a:p>
+        </p:txBody>
       </p:sp>
       <p:sp>
         <p:nvSpPr>
@@ -7350,7 +7397,7 @@
           <a:bodyPr wrap="square" rtlCol="0" anchor="ctr"/>
           <a:lstStyle/>
           <a:p>
-            <a:pPr algn="ctr" indent="0" marL="0">
+            <a:pPr marL="0" indent="0" algn="ctr">
               <a:buNone/>
             </a:pPr>
             <a:r>
@@ -7389,7 +7436,7 @@
           <a:bodyPr wrap="square" rtlCol="0" anchor="ctr"/>
           <a:lstStyle/>
           <a:p>
-            <a:pPr indent="0" marL="0">
+            <a:pPr marL="0" indent="0">
               <a:buNone/>
             </a:pPr>
             <a:r>
@@ -7428,7 +7475,7 @@
           <a:bodyPr wrap="square" rtlCol="0" anchor="ctr"/>
           <a:lstStyle/>
           <a:p>
-            <a:pPr indent="0" marL="0">
+            <a:pPr marL="0" indent="0">
               <a:buNone/>
             </a:pPr>
             <a:r>
@@ -7472,6 +7519,13 @@
             <a:prstDash val="solid"/>
           </a:ln>
         </p:spPr>
+        <p:txBody>
+          <a:bodyPr/>
+          <a:lstStyle/>
+          <a:p>
+            <a:endParaRPr lang="ja-JP" altLang="en-US"/>
+          </a:p>
+        </p:txBody>
       </p:sp>
       <p:sp>
         <p:nvSpPr>
@@ -7492,6 +7546,13 @@
           </a:solidFill>
           <a:ln/>
         </p:spPr>
+        <p:txBody>
+          <a:bodyPr/>
+          <a:lstStyle/>
+          <a:p>
+            <a:endParaRPr lang="ja-JP" altLang="en-US"/>
+          </a:p>
+        </p:txBody>
       </p:sp>
       <p:sp>
         <p:nvSpPr>
@@ -7514,7 +7575,7 @@
           <a:bodyPr wrap="square" rtlCol="0" anchor="ctr"/>
           <a:lstStyle/>
           <a:p>
-            <a:pPr algn="ctr" indent="0" marL="0">
+            <a:pPr marL="0" indent="0" algn="ctr">
               <a:buNone/>
             </a:pPr>
             <a:r>
@@ -7553,7 +7614,7 @@
           <a:bodyPr wrap="square" rtlCol="0" anchor="ctr"/>
           <a:lstStyle/>
           <a:p>
-            <a:pPr indent="0" marL="0">
+            <a:pPr marL="0" indent="0">
               <a:buNone/>
             </a:pPr>
             <a:r>
@@ -7592,7 +7653,7 @@
           <a:bodyPr wrap="square" rtlCol="0" anchor="ctr"/>
           <a:lstStyle/>
           <a:p>
-            <a:pPr indent="0" marL="0">
+            <a:pPr marL="0" indent="0">
               <a:buNone/>
             </a:pPr>
             <a:r>
@@ -7636,6 +7697,13 @@
             <a:prstDash val="solid"/>
           </a:ln>
         </p:spPr>
+        <p:txBody>
+          <a:bodyPr/>
+          <a:lstStyle/>
+          <a:p>
+            <a:endParaRPr lang="ja-JP" altLang="en-US"/>
+          </a:p>
+        </p:txBody>
       </p:sp>
       <p:sp>
         <p:nvSpPr>
@@ -7656,6 +7724,13 @@
           </a:solidFill>
           <a:ln/>
         </p:spPr>
+        <p:txBody>
+          <a:bodyPr/>
+          <a:lstStyle/>
+          <a:p>
+            <a:endParaRPr lang="ja-JP" altLang="en-US"/>
+          </a:p>
+        </p:txBody>
       </p:sp>
       <p:sp>
         <p:nvSpPr>
@@ -7678,7 +7753,7 @@
           <a:bodyPr wrap="square" rtlCol="0" anchor="ctr"/>
           <a:lstStyle/>
           <a:p>
-            <a:pPr algn="ctr" indent="0" marL="0">
+            <a:pPr marL="0" indent="0" algn="ctr">
               <a:buNone/>
             </a:pPr>
             <a:r>
@@ -7717,7 +7792,7 @@
           <a:bodyPr wrap="square" rtlCol="0" anchor="ctr"/>
           <a:lstStyle/>
           <a:p>
-            <a:pPr indent="0" marL="0">
+            <a:pPr marL="0" indent="0">
               <a:buNone/>
             </a:pPr>
             <a:r>
@@ -7756,7 +7831,7 @@
           <a:bodyPr wrap="square" rtlCol="0" anchor="ctr"/>
           <a:lstStyle/>
           <a:p>
-            <a:pPr indent="0" marL="0">
+            <a:pPr marL="0" indent="0">
               <a:buNone/>
             </a:pPr>
             <a:r>
@@ -7795,7 +7870,7 @@
           <a:bodyPr wrap="square" rtlCol="0" anchor="ctr"/>
           <a:lstStyle/>
           <a:p>
-            <a:pPr indent="0" marL="0">
+            <a:pPr marL="0" indent="0">
               <a:buNone/>
             </a:pPr>
             <a:r>
@@ -7834,7 +7909,7 @@
           <a:bodyPr wrap="square" rtlCol="0" anchor="ctr"/>
           <a:lstStyle/>
           <a:p>
-            <a:pPr algn="r" indent="0" marL="0">
+            <a:pPr marL="0" indent="0" algn="r">
               <a:buNone/>
             </a:pPr>
             <a:r>
@@ -7873,7 +7948,7 @@
           <a:bodyPr wrap="square" rtlCol="0" anchor="ctr"/>
           <a:lstStyle/>
           <a:p>
-            <a:pPr algn="r" indent="0" marL="0">
+            <a:pPr marL="0" indent="0" algn="r">
               <a:buNone/>
             </a:pPr>
             <a:r>
@@ -7907,6 +7982,7 @@
         <a:solidFill>
           <a:srgbClr val="333333"/>
         </a:solidFill>
+        <a:effectLst/>
       </p:bgPr>
     </p:bg>
     <p:spTree>
@@ -7947,6 +8023,13 @@
             <a:prstDash val="solid"/>
           </a:ln>
         </p:spPr>
+        <p:txBody>
+          <a:bodyPr/>
+          <a:lstStyle/>
+          <a:p>
+            <a:endParaRPr lang="ja-JP" altLang="en-US"/>
+          </a:p>
+        </p:txBody>
       </p:sp>
       <p:sp>
         <p:nvSpPr>
@@ -7969,7 +8052,7 @@
           <a:bodyPr wrap="square" rtlCol="0" anchor="ctr"/>
           <a:lstStyle/>
           <a:p>
-            <a:pPr indent="0" marL="0">
+            <a:pPr marL="0" indent="0">
               <a:buNone/>
             </a:pPr>
             <a:r>
@@ -8008,7 +8091,7 @@
           <a:bodyPr wrap="square" rtlCol="0" anchor="ctr"/>
           <a:lstStyle/>
           <a:p>
-            <a:pPr indent="0" marL="0">
+            <a:pPr marL="0" indent="0">
               <a:buNone/>
             </a:pPr>
             <a:r>
@@ -8047,7 +8130,7 @@
           <a:bodyPr wrap="square" rtlCol="0" anchor="ctr"/>
           <a:lstStyle/>
           <a:p>
-            <a:pPr indent="0" marL="0">
+            <a:pPr marL="0" indent="0">
               <a:buNone/>
             </a:pPr>
             <a:r>
@@ -8086,7 +8169,7 @@
           <a:bodyPr wrap="square" rtlCol="0" anchor="ctr"/>
           <a:lstStyle/>
           <a:p>
-            <a:pPr indent="0" marL="0">
+            <a:pPr marL="0" indent="0">
               <a:buNone/>
             </a:pPr>
             <a:r>
@@ -8125,7 +8208,7 @@
           <a:bodyPr wrap="square" rtlCol="0" anchor="ctr"/>
           <a:lstStyle/>
           <a:p>
-            <a:pPr algn="r" indent="0" marL="0">
+            <a:pPr marL="0" indent="0" algn="r">
               <a:buNone/>
             </a:pPr>
             <a:r>
@@ -8159,6 +8242,7 @@
         <a:solidFill>
           <a:srgbClr val="FFFFFF"/>
         </a:solidFill>
+        <a:effectLst/>
       </p:bgPr>
     </p:bg>
     <p:spTree>
@@ -8199,6 +8283,13 @@
             <a:prstDash val="solid"/>
           </a:ln>
         </p:spPr>
+        <p:txBody>
+          <a:bodyPr/>
+          <a:lstStyle/>
+          <a:p>
+            <a:endParaRPr lang="ja-JP" altLang="en-US"/>
+          </a:p>
+        </p:txBody>
       </p:sp>
       <p:sp>
         <p:nvSpPr>
@@ -8221,7 +8312,7 @@
           <a:bodyPr wrap="square" rtlCol="0" anchor="ctr"/>
           <a:lstStyle/>
           <a:p>
-            <a:pPr indent="0" marL="0">
+            <a:pPr marL="0" indent="0">
               <a:buNone/>
             </a:pPr>
             <a:r>
@@ -8260,7 +8351,7 @@
           <a:bodyPr wrap="square" rtlCol="0" anchor="ctr"/>
           <a:lstStyle/>
           <a:p>
-            <a:pPr algn="r" indent="0" marL="0">
+            <a:pPr marL="0" indent="0" algn="r">
               <a:buNone/>
             </a:pPr>
             <a:r>
@@ -8302,6 +8393,13 @@
             <a:prstDash val="solid"/>
           </a:ln>
         </p:spPr>
+        <p:txBody>
+          <a:bodyPr/>
+          <a:lstStyle/>
+          <a:p>
+            <a:endParaRPr lang="ja-JP" altLang="en-US"/>
+          </a:p>
+        </p:txBody>
       </p:sp>
       <p:sp>
         <p:nvSpPr>
@@ -8324,7 +8422,7 @@
           <a:bodyPr wrap="square" rtlCol="0" anchor="ctr"/>
           <a:lstStyle/>
           <a:p>
-            <a:pPr indent="0" marL="0">
+            <a:pPr marL="0" indent="0">
               <a:buNone/>
             </a:pPr>
             <a:r>
@@ -8368,6 +8466,13 @@
             <a:prstDash val="solid"/>
           </a:ln>
         </p:spPr>
+        <p:txBody>
+          <a:bodyPr/>
+          <a:lstStyle/>
+          <a:p>
+            <a:endParaRPr lang="ja-JP" altLang="en-US"/>
+          </a:p>
+        </p:txBody>
       </p:sp>
       <p:sp>
         <p:nvSpPr>
@@ -8390,7 +8495,7 @@
           <a:bodyPr wrap="square" rtlCol="0" anchor="ctr"/>
           <a:lstStyle/>
           <a:p>
-            <a:pPr indent="0" marL="0">
+            <a:pPr marL="0" indent="0">
               <a:buNone/>
             </a:pPr>
             <a:r>
@@ -8427,6 +8532,13 @@
           </a:solidFill>
           <a:ln/>
         </p:spPr>
+        <p:txBody>
+          <a:bodyPr/>
+          <a:lstStyle/>
+          <a:p>
+            <a:endParaRPr lang="ja-JP" altLang="en-US"/>
+          </a:p>
+        </p:txBody>
       </p:sp>
       <p:sp>
         <p:nvSpPr>
@@ -8449,7 +8561,7 @@
           <a:bodyPr wrap="square" rtlCol="0" anchor="t"/>
           <a:lstStyle/>
           <a:p>
-            <a:pPr indent="0" marL="0">
+            <a:pPr marL="0" indent="0">
               <a:buNone/>
             </a:pPr>
             <a:r>
@@ -8466,7 +8578,7 @@
             <a:endParaRPr lang="en-US" sz="1100" dirty="0"/>
           </a:p>
           <a:p>
-            <a:pPr indent="0" marL="0">
+            <a:pPr marL="0" indent="0">
               <a:buNone/>
             </a:pPr>
             <a:r>
@@ -8503,6 +8615,13 @@
           </a:solidFill>
           <a:ln/>
         </p:spPr>
+        <p:txBody>
+          <a:bodyPr/>
+          <a:lstStyle/>
+          <a:p>
+            <a:endParaRPr lang="ja-JP" altLang="en-US"/>
+          </a:p>
+        </p:txBody>
       </p:sp>
       <p:sp>
         <p:nvSpPr>
@@ -8525,7 +8644,7 @@
           <a:bodyPr wrap="square" rtlCol="0" anchor="t"/>
           <a:lstStyle/>
           <a:p>
-            <a:pPr indent="0" marL="0">
+            <a:pPr marL="0" indent="0">
               <a:buNone/>
             </a:pPr>
             <a:r>
@@ -8562,6 +8681,13 @@
           </a:solidFill>
           <a:ln/>
         </p:spPr>
+        <p:txBody>
+          <a:bodyPr/>
+          <a:lstStyle/>
+          <a:p>
+            <a:endParaRPr lang="ja-JP" altLang="en-US"/>
+          </a:p>
+        </p:txBody>
       </p:sp>
       <p:sp>
         <p:nvSpPr>
@@ -8584,7 +8710,7 @@
           <a:bodyPr wrap="square" rtlCol="0" anchor="t"/>
           <a:lstStyle/>
           <a:p>
-            <a:pPr indent="0" marL="0">
+            <a:pPr marL="0" indent="0">
               <a:buNone/>
             </a:pPr>
             <a:r>
@@ -8621,6 +8747,13 @@
           </a:solidFill>
           <a:ln/>
         </p:spPr>
+        <p:txBody>
+          <a:bodyPr/>
+          <a:lstStyle/>
+          <a:p>
+            <a:endParaRPr lang="ja-JP" altLang="en-US"/>
+          </a:p>
+        </p:txBody>
       </p:sp>
       <p:sp>
         <p:nvSpPr>
@@ -8643,7 +8776,7 @@
           <a:bodyPr wrap="square" rtlCol="0" anchor="t"/>
           <a:lstStyle/>
           <a:p>
-            <a:pPr indent="0" marL="0">
+            <a:pPr marL="0" indent="0">
               <a:buNone/>
             </a:pPr>
             <a:r>
@@ -8687,6 +8820,13 @@
             <a:prstDash val="solid"/>
           </a:ln>
         </p:spPr>
+        <p:txBody>
+          <a:bodyPr/>
+          <a:lstStyle/>
+          <a:p>
+            <a:endParaRPr lang="ja-JP" altLang="en-US"/>
+          </a:p>
+        </p:txBody>
       </p:sp>
       <p:sp>
         <p:nvSpPr>
@@ -8709,7 +8849,7 @@
           <a:bodyPr wrap="square" rtlCol="0" anchor="ctr"/>
           <a:lstStyle/>
           <a:p>
-            <a:pPr indent="0" marL="0">
+            <a:pPr marL="0" indent="0">
               <a:buNone/>
             </a:pPr>
             <a:r>
@@ -8746,6 +8886,13 @@
           </a:solidFill>
           <a:ln/>
         </p:spPr>
+        <p:txBody>
+          <a:bodyPr/>
+          <a:lstStyle/>
+          <a:p>
+            <a:endParaRPr lang="ja-JP" altLang="en-US"/>
+          </a:p>
+        </p:txBody>
       </p:sp>
       <p:sp>
         <p:nvSpPr>
@@ -8768,7 +8915,7 @@
           <a:bodyPr wrap="square" rtlCol="0" anchor="t"/>
           <a:lstStyle/>
           <a:p>
-            <a:pPr indent="0" marL="0">
+            <a:pPr marL="0" indent="0">
               <a:buNone/>
             </a:pPr>
             <a:r>
@@ -8805,6 +8952,13 @@
           </a:solidFill>
           <a:ln/>
         </p:spPr>
+        <p:txBody>
+          <a:bodyPr/>
+          <a:lstStyle/>
+          <a:p>
+            <a:endParaRPr lang="ja-JP" altLang="en-US"/>
+          </a:p>
+        </p:txBody>
       </p:sp>
       <p:sp>
         <p:nvSpPr>
@@ -8827,7 +8981,7 @@
           <a:bodyPr wrap="square" rtlCol="0" anchor="t"/>
           <a:lstStyle/>
           <a:p>
-            <a:pPr indent="0" marL="0">
+            <a:pPr marL="0" indent="0">
               <a:buNone/>
             </a:pPr>
             <a:r>
@@ -8864,6 +9018,13 @@
           </a:solidFill>
           <a:ln/>
         </p:spPr>
+        <p:txBody>
+          <a:bodyPr/>
+          <a:lstStyle/>
+          <a:p>
+            <a:endParaRPr lang="ja-JP" altLang="en-US"/>
+          </a:p>
+        </p:txBody>
       </p:sp>
       <p:sp>
         <p:nvSpPr>
@@ -8886,7 +9047,7 @@
           <a:bodyPr wrap="square" rtlCol="0" anchor="t"/>
           <a:lstStyle/>
           <a:p>
-            <a:pPr indent="0" marL="0">
+            <a:pPr marL="0" indent="0">
               <a:buNone/>
             </a:pPr>
             <a:r>
@@ -8923,6 +9084,13 @@
           </a:solidFill>
           <a:ln/>
         </p:spPr>
+        <p:txBody>
+          <a:bodyPr/>
+          <a:lstStyle/>
+          <a:p>
+            <a:endParaRPr lang="ja-JP" altLang="en-US"/>
+          </a:p>
+        </p:txBody>
       </p:sp>
       <p:sp>
         <p:nvSpPr>
@@ -8945,7 +9113,7 @@
           <a:bodyPr wrap="square" rtlCol="0" anchor="t"/>
           <a:lstStyle/>
           <a:p>
-            <a:pPr indent="0" marL="0">
+            <a:pPr marL="0" indent="0">
               <a:buNone/>
             </a:pPr>
             <a:r>
@@ -8984,7 +9152,7 @@
           <a:bodyPr wrap="square" rtlCol="0" anchor="ctr"/>
           <a:lstStyle/>
           <a:p>
-            <a:pPr indent="0" marL="0">
+            <a:pPr marL="0" indent="0">
               <a:buNone/>
             </a:pPr>
             <a:r>
@@ -9023,7 +9191,7 @@
           <a:bodyPr wrap="square" rtlCol="0" anchor="ctr"/>
           <a:lstStyle/>
           <a:p>
-            <a:pPr algn="r" indent="0" marL="0">
+            <a:pPr marL="0" indent="0" algn="r">
               <a:buNone/>
             </a:pPr>
             <a:r>
@@ -9062,7 +9230,7 @@
           <a:bodyPr wrap="square" rtlCol="0" anchor="ctr"/>
           <a:lstStyle/>
           <a:p>
-            <a:pPr algn="r" indent="0" marL="0">
+            <a:pPr marL="0" indent="0" algn="r">
               <a:buNone/>
             </a:pPr>
             <a:r>
@@ -9096,6 +9264,7 @@
         <a:solidFill>
           <a:srgbClr val="FFFFFF"/>
         </a:solidFill>
+        <a:effectLst/>
       </p:bgPr>
     </p:bg>
     <p:spTree>
@@ -9136,6 +9305,13 @@
             <a:prstDash val="solid"/>
           </a:ln>
         </p:spPr>
+        <p:txBody>
+          <a:bodyPr/>
+          <a:lstStyle/>
+          <a:p>
+            <a:endParaRPr lang="ja-JP" altLang="en-US"/>
+          </a:p>
+        </p:txBody>
       </p:sp>
       <p:sp>
         <p:nvSpPr>
@@ -9158,7 +9334,7 @@
           <a:bodyPr wrap="square" rtlCol="0" anchor="ctr"/>
           <a:lstStyle/>
           <a:p>
-            <a:pPr indent="0" marL="0">
+            <a:pPr marL="0" indent="0">
               <a:buNone/>
             </a:pPr>
             <a:r>
@@ -9197,7 +9373,7 @@
           <a:bodyPr wrap="square" rtlCol="0" anchor="ctr"/>
           <a:lstStyle/>
           <a:p>
-            <a:pPr algn="r" indent="0" marL="0">
+            <a:pPr marL="0" indent="0" algn="r">
               <a:buNone/>
             </a:pPr>
             <a:r>
@@ -9239,6 +9415,13 @@
             <a:prstDash val="solid"/>
           </a:ln>
         </p:spPr>
+        <p:txBody>
+          <a:bodyPr/>
+          <a:lstStyle/>
+          <a:p>
+            <a:endParaRPr lang="ja-JP" altLang="en-US"/>
+          </a:p>
+        </p:txBody>
       </p:sp>
       <p:sp>
         <p:nvSpPr>
@@ -9261,7 +9444,7 @@
           <a:bodyPr wrap="square" rtlCol="0" anchor="ctr"/>
           <a:lstStyle/>
           <a:p>
-            <a:pPr indent="0" marL="0">
+            <a:pPr marL="0" indent="0">
               <a:buNone/>
             </a:pPr>
             <a:r>
@@ -9305,6 +9488,13 @@
             <a:prstDash val="solid"/>
           </a:ln>
         </p:spPr>
+        <p:txBody>
+          <a:bodyPr/>
+          <a:lstStyle/>
+          <a:p>
+            <a:endParaRPr lang="ja-JP" altLang="en-US"/>
+          </a:p>
+        </p:txBody>
       </p:sp>
       <p:sp>
         <p:nvSpPr>
@@ -9325,6 +9515,13 @@
           </a:solidFill>
           <a:ln/>
         </p:spPr>
+        <p:txBody>
+          <a:bodyPr/>
+          <a:lstStyle/>
+          <a:p>
+            <a:endParaRPr lang="ja-JP" altLang="en-US"/>
+          </a:p>
+        </p:txBody>
       </p:sp>
       <p:sp>
         <p:nvSpPr>
@@ -9347,7 +9544,7 @@
           <a:bodyPr wrap="square" rtlCol="0" anchor="ctr"/>
           <a:lstStyle/>
           <a:p>
-            <a:pPr algn="ctr" indent="0" marL="0">
+            <a:pPr marL="0" indent="0" algn="ctr">
               <a:buNone/>
             </a:pPr>
             <a:r>
@@ -9386,7 +9583,7 @@
           <a:bodyPr wrap="square" rtlCol="0" anchor="ctr"/>
           <a:lstStyle/>
           <a:p>
-            <a:pPr indent="0" marL="0">
+            <a:pPr marL="0" indent="0">
               <a:buNone/>
             </a:pPr>
             <a:r>
@@ -9536,6 +9733,13 @@
             <a:prstDash val="solid"/>
           </a:ln>
         </p:spPr>
+        <p:txBody>
+          <a:bodyPr/>
+          <a:lstStyle/>
+          <a:p>
+            <a:endParaRPr lang="ja-JP" altLang="en-US"/>
+          </a:p>
+        </p:txBody>
       </p:sp>
       <p:sp>
         <p:nvSpPr>
@@ -9556,6 +9760,13 @@
           </a:solidFill>
           <a:ln/>
         </p:spPr>
+        <p:txBody>
+          <a:bodyPr/>
+          <a:lstStyle/>
+          <a:p>
+            <a:endParaRPr lang="ja-JP" altLang="en-US"/>
+          </a:p>
+        </p:txBody>
       </p:sp>
       <p:sp>
         <p:nvSpPr>
@@ -9578,7 +9789,7 @@
           <a:bodyPr wrap="square" rtlCol="0" anchor="ctr"/>
           <a:lstStyle/>
           <a:p>
-            <a:pPr algn="ctr" indent="0" marL="0">
+            <a:pPr marL="0" indent="0" algn="ctr">
               <a:buNone/>
             </a:pPr>
             <a:r>
@@ -9617,7 +9828,7 @@
           <a:bodyPr wrap="square" rtlCol="0" anchor="ctr"/>
           <a:lstStyle/>
           <a:p>
-            <a:pPr indent="0" marL="0">
+            <a:pPr marL="0" indent="0">
               <a:buNone/>
             </a:pPr>
             <a:r>
@@ -9762,7 +9973,7 @@
           <a:bodyPr wrap="square" rtlCol="0" anchor="ctr"/>
           <a:lstStyle/>
           <a:p>
-            <a:pPr indent="0" marL="0">
+            <a:pPr marL="0" indent="0">
               <a:buNone/>
             </a:pPr>
             <a:r>
@@ -9801,7 +10012,7 @@
           <a:bodyPr wrap="square" rtlCol="0" anchor="ctr"/>
           <a:lstStyle/>
           <a:p>
-            <a:pPr indent="0" marL="0">
+            <a:pPr marL="0" indent="0">
               <a:buNone/>
             </a:pPr>
             <a:r>
@@ -9840,7 +10051,7 @@
           <a:bodyPr wrap="square" rtlCol="0" anchor="ctr"/>
           <a:lstStyle/>
           <a:p>
-            <a:pPr algn="r" indent="0" marL="0">
+            <a:pPr marL="0" indent="0" algn="r">
               <a:buNone/>
             </a:pPr>
             <a:r>
@@ -9879,7 +10090,7 @@
           <a:bodyPr wrap="square" rtlCol="0" anchor="ctr"/>
           <a:lstStyle/>
           <a:p>
-            <a:pPr algn="r" indent="0" marL="0">
+            <a:pPr marL="0" indent="0" algn="r">
               <a:buNone/>
             </a:pPr>
             <a:r>
@@ -9913,6 +10124,7 @@
         <a:solidFill>
           <a:srgbClr val="FFFFFF"/>
         </a:solidFill>
+        <a:effectLst/>
       </p:bgPr>
     </p:bg>
     <p:spTree>
@@ -9953,6 +10165,13 @@
             <a:prstDash val="solid"/>
           </a:ln>
         </p:spPr>
+        <p:txBody>
+          <a:bodyPr/>
+          <a:lstStyle/>
+          <a:p>
+            <a:endParaRPr lang="ja-JP" altLang="en-US"/>
+          </a:p>
+        </p:txBody>
       </p:sp>
       <p:sp>
         <p:nvSpPr>
@@ -9975,7 +10194,7 @@
           <a:bodyPr wrap="square" rtlCol="0" anchor="ctr"/>
           <a:lstStyle/>
           <a:p>
-            <a:pPr indent="0" marL="0">
+            <a:pPr marL="0" indent="0">
               <a:buNone/>
             </a:pPr>
             <a:r>
@@ -10014,7 +10233,7 @@
           <a:bodyPr wrap="square" rtlCol="0" anchor="ctr"/>
           <a:lstStyle/>
           <a:p>
-            <a:pPr algn="r" indent="0" marL="0">
+            <a:pPr marL="0" indent="0" algn="r">
               <a:buNone/>
             </a:pPr>
             <a:r>
@@ -10056,6 +10275,13 @@
             <a:prstDash val="solid"/>
           </a:ln>
         </p:spPr>
+        <p:txBody>
+          <a:bodyPr/>
+          <a:lstStyle/>
+          <a:p>
+            <a:endParaRPr lang="ja-JP" altLang="en-US"/>
+          </a:p>
+        </p:txBody>
       </p:sp>
       <p:sp>
         <p:nvSpPr>
@@ -10083,6 +10309,13 @@
             <a:prstDash val="solid"/>
           </a:ln>
         </p:spPr>
+        <p:txBody>
+          <a:bodyPr/>
+          <a:lstStyle/>
+          <a:p>
+            <a:endParaRPr lang="ja-JP" altLang="en-US"/>
+          </a:p>
+        </p:txBody>
       </p:sp>
       <p:sp>
         <p:nvSpPr>
@@ -10103,6 +10336,13 @@
           </a:solidFill>
           <a:ln/>
         </p:spPr>
+        <p:txBody>
+          <a:bodyPr/>
+          <a:lstStyle/>
+          <a:p>
+            <a:endParaRPr lang="ja-JP" altLang="en-US"/>
+          </a:p>
+        </p:txBody>
       </p:sp>
       <p:sp>
         <p:nvSpPr>
@@ -10125,7 +10365,7 @@
           <a:bodyPr wrap="square" rtlCol="0" anchor="ctr"/>
           <a:lstStyle/>
           <a:p>
-            <a:pPr algn="ctr" indent="0" marL="0">
+            <a:pPr marL="0" indent="0" algn="ctr">
               <a:buNone/>
             </a:pPr>
             <a:r>
@@ -10164,7 +10404,7 @@
           <a:bodyPr wrap="square" rtlCol="0" anchor="ctr"/>
           <a:lstStyle/>
           <a:p>
-            <a:pPr indent="0" marL="0">
+            <a:pPr marL="0" indent="0">
               <a:buNone/>
             </a:pPr>
             <a:r>
@@ -10203,7 +10443,7 @@
           <a:bodyPr wrap="square" rtlCol="0" anchor="t"/>
           <a:lstStyle/>
           <a:p>
-            <a:pPr indent="0" marL="0">
+            <a:pPr marL="0" indent="0">
               <a:buNone/>
             </a:pPr>
             <a:r>
@@ -10247,6 +10487,13 @@
             <a:prstDash val="solid"/>
           </a:ln>
         </p:spPr>
+        <p:txBody>
+          <a:bodyPr/>
+          <a:lstStyle/>
+          <a:p>
+            <a:endParaRPr lang="ja-JP" altLang="en-US"/>
+          </a:p>
+        </p:txBody>
       </p:sp>
       <p:sp>
         <p:nvSpPr>
@@ -10267,6 +10514,13 @@
           </a:solidFill>
           <a:ln/>
         </p:spPr>
+        <p:txBody>
+          <a:bodyPr/>
+          <a:lstStyle/>
+          <a:p>
+            <a:endParaRPr lang="ja-JP" altLang="en-US"/>
+          </a:p>
+        </p:txBody>
       </p:sp>
       <p:sp>
         <p:nvSpPr>
@@ -10289,7 +10543,7 @@
           <a:bodyPr wrap="square" rtlCol="0" anchor="ctr"/>
           <a:lstStyle/>
           <a:p>
-            <a:pPr algn="ctr" indent="0" marL="0">
+            <a:pPr marL="0" indent="0" algn="ctr">
               <a:buNone/>
             </a:pPr>
             <a:r>
@@ -10328,7 +10582,7 @@
           <a:bodyPr wrap="square" rtlCol="0" anchor="ctr"/>
           <a:lstStyle/>
           <a:p>
-            <a:pPr indent="0" marL="0">
+            <a:pPr marL="0" indent="0">
               <a:buNone/>
             </a:pPr>
             <a:r>
@@ -10367,7 +10621,7 @@
           <a:bodyPr wrap="square" rtlCol="0" anchor="t"/>
           <a:lstStyle/>
           <a:p>
-            <a:pPr indent="0" marL="0">
+            <a:pPr marL="0" indent="0">
               <a:buNone/>
             </a:pPr>
             <a:r>
@@ -10411,6 +10665,13 @@
             <a:prstDash val="solid"/>
           </a:ln>
         </p:spPr>
+        <p:txBody>
+          <a:bodyPr/>
+          <a:lstStyle/>
+          <a:p>
+            <a:endParaRPr lang="ja-JP" altLang="en-US"/>
+          </a:p>
+        </p:txBody>
       </p:sp>
       <p:sp>
         <p:nvSpPr>
@@ -10431,6 +10692,13 @@
           </a:solidFill>
           <a:ln/>
         </p:spPr>
+        <p:txBody>
+          <a:bodyPr/>
+          <a:lstStyle/>
+          <a:p>
+            <a:endParaRPr lang="ja-JP" altLang="en-US"/>
+          </a:p>
+        </p:txBody>
       </p:sp>
       <p:sp>
         <p:nvSpPr>
@@ -10453,7 +10721,7 @@
           <a:bodyPr wrap="square" rtlCol="0" anchor="ctr"/>
           <a:lstStyle/>
           <a:p>
-            <a:pPr algn="ctr" indent="0" marL="0">
+            <a:pPr marL="0" indent="0" algn="ctr">
               <a:buNone/>
             </a:pPr>
             <a:r>
@@ -10492,7 +10760,7 @@
           <a:bodyPr wrap="square" rtlCol="0" anchor="ctr"/>
           <a:lstStyle/>
           <a:p>
-            <a:pPr indent="0" marL="0">
+            <a:pPr marL="0" indent="0">
               <a:buNone/>
             </a:pPr>
             <a:r>
@@ -10531,7 +10799,7 @@
           <a:bodyPr wrap="square" rtlCol="0" anchor="t"/>
           <a:lstStyle/>
           <a:p>
-            <a:pPr indent="0" marL="0">
+            <a:pPr marL="0" indent="0">
               <a:buNone/>
             </a:pPr>
             <a:r>
@@ -10575,6 +10843,13 @@
             <a:prstDash val="solid"/>
           </a:ln>
         </p:spPr>
+        <p:txBody>
+          <a:bodyPr/>
+          <a:lstStyle/>
+          <a:p>
+            <a:endParaRPr lang="ja-JP" altLang="en-US"/>
+          </a:p>
+        </p:txBody>
       </p:sp>
       <p:sp>
         <p:nvSpPr>
@@ -10595,6 +10870,13 @@
           </a:solidFill>
           <a:ln/>
         </p:spPr>
+        <p:txBody>
+          <a:bodyPr/>
+          <a:lstStyle/>
+          <a:p>
+            <a:endParaRPr lang="ja-JP" altLang="en-US"/>
+          </a:p>
+        </p:txBody>
       </p:sp>
       <p:sp>
         <p:nvSpPr>
@@ -10617,7 +10899,7 @@
           <a:bodyPr wrap="square" rtlCol="0" anchor="ctr"/>
           <a:lstStyle/>
           <a:p>
-            <a:pPr algn="ctr" indent="0" marL="0">
+            <a:pPr marL="0" indent="0" algn="ctr">
               <a:buNone/>
             </a:pPr>
             <a:r>
@@ -10656,7 +10938,7 @@
           <a:bodyPr wrap="square" rtlCol="0" anchor="ctr"/>
           <a:lstStyle/>
           <a:p>
-            <a:pPr indent="0" marL="0">
+            <a:pPr marL="0" indent="0">
               <a:buNone/>
             </a:pPr>
             <a:r>
@@ -10695,7 +10977,7 @@
           <a:bodyPr wrap="square" rtlCol="0" anchor="t"/>
           <a:lstStyle/>
           <a:p>
-            <a:pPr indent="0" marL="0">
+            <a:pPr marL="0" indent="0">
               <a:buNone/>
             </a:pPr>
             <a:r>
@@ -10734,7 +11016,7 @@
           <a:bodyPr wrap="square" rtlCol="0" anchor="ctr"/>
           <a:lstStyle/>
           <a:p>
-            <a:pPr indent="0" marL="0">
+            <a:pPr marL="0" indent="0">
               <a:buNone/>
             </a:pPr>
             <a:r>
@@ -10773,7 +11055,7 @@
           <a:bodyPr wrap="square" rtlCol="0" anchor="ctr"/>
           <a:lstStyle/>
           <a:p>
-            <a:pPr indent="0" marL="0">
+            <a:pPr marL="0" indent="0">
               <a:buNone/>
             </a:pPr>
             <a:r>
@@ -10812,7 +11094,7 @@
           <a:bodyPr wrap="square" rtlCol="0" anchor="ctr"/>
           <a:lstStyle/>
           <a:p>
-            <a:pPr algn="r" indent="0" marL="0">
+            <a:pPr marL="0" indent="0" algn="r">
               <a:buNone/>
             </a:pPr>
             <a:r>
@@ -10851,7 +11133,7 @@
           <a:bodyPr wrap="square" rtlCol="0" anchor="ctr"/>
           <a:lstStyle/>
           <a:p>
-            <a:pPr algn="r" indent="0" marL="0">
+            <a:pPr marL="0" indent="0" algn="r">
               <a:buNone/>
             </a:pPr>
             <a:r>
@@ -10885,6 +11167,7 @@
         <a:solidFill>
           <a:srgbClr val="FFFFFF"/>
         </a:solidFill>
+        <a:effectLst/>
       </p:bgPr>
     </p:bg>
     <p:spTree>
@@ -10925,6 +11208,13 @@
             <a:prstDash val="solid"/>
           </a:ln>
         </p:spPr>
+        <p:txBody>
+          <a:bodyPr/>
+          <a:lstStyle/>
+          <a:p>
+            <a:endParaRPr lang="ja-JP" altLang="en-US"/>
+          </a:p>
+        </p:txBody>
       </p:sp>
       <p:sp>
         <p:nvSpPr>
@@ -10947,7 +11237,7 @@
           <a:bodyPr wrap="square" rtlCol="0" anchor="ctr"/>
           <a:lstStyle/>
           <a:p>
-            <a:pPr indent="0" marL="0">
+            <a:pPr marL="0" indent="0">
               <a:buNone/>
             </a:pPr>
             <a:r>
@@ -10986,7 +11276,7 @@
           <a:bodyPr wrap="square" rtlCol="0" anchor="ctr"/>
           <a:lstStyle/>
           <a:p>
-            <a:pPr algn="r" indent="0" marL="0">
+            <a:pPr marL="0" indent="0" algn="r">
               <a:buNone/>
             </a:pPr>
             <a:r>
@@ -11028,6 +11318,13 @@
             <a:prstDash val="solid"/>
           </a:ln>
         </p:spPr>
+        <p:txBody>
+          <a:bodyPr/>
+          <a:lstStyle/>
+          <a:p>
+            <a:endParaRPr lang="ja-JP" altLang="en-US"/>
+          </a:p>
+        </p:txBody>
       </p:sp>
       <p:sp>
         <p:nvSpPr>
@@ -11050,7 +11347,7 @@
           <a:bodyPr wrap="square" rtlCol="0" anchor="ctr"/>
           <a:lstStyle/>
           <a:p>
-            <a:pPr indent="0" marL="0">
+            <a:pPr marL="0" indent="0">
               <a:buNone/>
             </a:pPr>
             <a:r>
@@ -11092,6 +11389,13 @@
             <a:prstDash val="solid"/>
           </a:ln>
         </p:spPr>
+        <p:txBody>
+          <a:bodyPr/>
+          <a:lstStyle/>
+          <a:p>
+            <a:endParaRPr lang="ja-JP" altLang="en-US"/>
+          </a:p>
+        </p:txBody>
       </p:sp>
       <p:sp>
         <p:nvSpPr>
@@ -11112,6 +11416,13 @@
           </a:solidFill>
           <a:ln/>
         </p:spPr>
+        <p:txBody>
+          <a:bodyPr/>
+          <a:lstStyle/>
+          <a:p>
+            <a:endParaRPr lang="ja-JP" altLang="en-US"/>
+          </a:p>
+        </p:txBody>
       </p:sp>
       <p:sp>
         <p:nvSpPr>
@@ -11134,7 +11445,7 @@
           <a:bodyPr wrap="square" rtlCol="0" anchor="ctr"/>
           <a:lstStyle/>
           <a:p>
-            <a:pPr algn="ctr" indent="0" marL="0">
+            <a:pPr marL="0" indent="0" algn="ctr">
               <a:buNone/>
             </a:pPr>
             <a:r>
@@ -11173,7 +11484,7 @@
           <a:bodyPr wrap="square" rtlCol="0" anchor="ctr"/>
           <a:lstStyle/>
           <a:p>
-            <a:pPr algn="ctr" indent="0" marL="0">
+            <a:pPr marL="0" indent="0" algn="ctr">
               <a:buNone/>
             </a:pPr>
             <a:r>
@@ -11212,7 +11523,7 @@
           <a:bodyPr wrap="square" rtlCol="0" anchor="ctr"/>
           <a:lstStyle/>
           <a:p>
-            <a:pPr algn="ctr" indent="0" marL="0">
+            <a:pPr marL="0" indent="0" algn="ctr">
               <a:buNone/>
             </a:pPr>
             <a:r>
@@ -11251,7 +11562,7 @@
           <a:bodyPr wrap="square" rtlCol="0" anchor="t"/>
           <a:lstStyle/>
           <a:p>
-            <a:pPr algn="ctr" indent="0" marL="0">
+            <a:pPr marL="0" indent="0" algn="ctr">
               <a:buNone/>
             </a:pPr>
             <a:r>
@@ -11290,7 +11601,7 @@
           <a:bodyPr wrap="square" rtlCol="0" anchor="ctr"/>
           <a:lstStyle/>
           <a:p>
-            <a:pPr algn="ctr" indent="0" marL="0">
+            <a:pPr marL="0" indent="0" algn="ctr">
               <a:buNone/>
             </a:pPr>
             <a:r>
@@ -11327,6 +11638,13 @@
           </a:solidFill>
           <a:ln/>
         </p:spPr>
+        <p:txBody>
+          <a:bodyPr/>
+          <a:lstStyle/>
+          <a:p>
+            <a:endParaRPr lang="ja-JP" altLang="en-US"/>
+          </a:p>
+        </p:txBody>
       </p:sp>
       <p:sp>
         <p:nvSpPr>
@@ -11349,7 +11667,7 @@
           <a:bodyPr wrap="square" rtlCol="0" anchor="ctr"/>
           <a:lstStyle/>
           <a:p>
-            <a:pPr algn="ctr" indent="0" marL="0">
+            <a:pPr marL="0" indent="0" algn="ctr">
               <a:buNone/>
             </a:pPr>
             <a:r>
@@ -11388,7 +11706,7 @@
           <a:bodyPr wrap="square" rtlCol="0" anchor="ctr"/>
           <a:lstStyle/>
           <a:p>
-            <a:pPr algn="ctr" indent="0" marL="0">
+            <a:pPr marL="0" indent="0" algn="ctr">
               <a:buNone/>
             </a:pPr>
             <a:r>
@@ -11427,7 +11745,7 @@
           <a:bodyPr wrap="square" rtlCol="0" anchor="ctr"/>
           <a:lstStyle/>
           <a:p>
-            <a:pPr algn="ctr" indent="0" marL="0">
+            <a:pPr marL="0" indent="0" algn="ctr">
               <a:buNone/>
             </a:pPr>
             <a:r>
@@ -11466,7 +11784,7 @@
           <a:bodyPr wrap="square" rtlCol="0" anchor="t"/>
           <a:lstStyle/>
           <a:p>
-            <a:pPr algn="ctr" indent="0" marL="0">
+            <a:pPr marL="0" indent="0" algn="ctr">
               <a:buNone/>
             </a:pPr>
             <a:r>
@@ -11505,7 +11823,7 @@
           <a:bodyPr wrap="square" rtlCol="0" anchor="ctr"/>
           <a:lstStyle/>
           <a:p>
-            <a:pPr algn="ctr" indent="0" marL="0">
+            <a:pPr marL="0" indent="0" algn="ctr">
               <a:buNone/>
             </a:pPr>
             <a:r>
@@ -11542,6 +11860,13 @@
           </a:solidFill>
           <a:ln/>
         </p:spPr>
+        <p:txBody>
+          <a:bodyPr/>
+          <a:lstStyle/>
+          <a:p>
+            <a:endParaRPr lang="ja-JP" altLang="en-US"/>
+          </a:p>
+        </p:txBody>
       </p:sp>
       <p:sp>
         <p:nvSpPr>
@@ -11564,7 +11889,7 @@
           <a:bodyPr wrap="square" rtlCol="0" anchor="ctr"/>
           <a:lstStyle/>
           <a:p>
-            <a:pPr algn="ctr" indent="0" marL="0">
+            <a:pPr marL="0" indent="0" algn="ctr">
               <a:buNone/>
             </a:pPr>
             <a:r>
@@ -11603,7 +11928,7 @@
           <a:bodyPr wrap="square" rtlCol="0" anchor="ctr"/>
           <a:lstStyle/>
           <a:p>
-            <a:pPr algn="ctr" indent="0" marL="0">
+            <a:pPr marL="0" indent="0" algn="ctr">
               <a:buNone/>
             </a:pPr>
             <a:r>
@@ -11642,7 +11967,7 @@
           <a:bodyPr wrap="square" rtlCol="0" anchor="ctr"/>
           <a:lstStyle/>
           <a:p>
-            <a:pPr algn="ctr" indent="0" marL="0">
+            <a:pPr marL="0" indent="0" algn="ctr">
               <a:buNone/>
             </a:pPr>
             <a:r>
@@ -11681,7 +12006,7 @@
           <a:bodyPr wrap="square" rtlCol="0" anchor="t"/>
           <a:lstStyle/>
           <a:p>
-            <a:pPr algn="ctr" indent="0" marL="0">
+            <a:pPr marL="0" indent="0" algn="ctr">
               <a:buNone/>
             </a:pPr>
             <a:r>
@@ -11720,7 +12045,7 @@
           <a:bodyPr wrap="square" rtlCol="0" anchor="ctr"/>
           <a:lstStyle/>
           <a:p>
-            <a:pPr algn="ctr" indent="0" marL="0">
+            <a:pPr marL="0" indent="0" algn="ctr">
               <a:buNone/>
             </a:pPr>
             <a:r>
@@ -11757,6 +12082,13 @@
           </a:solidFill>
           <a:ln/>
         </p:spPr>
+        <p:txBody>
+          <a:bodyPr/>
+          <a:lstStyle/>
+          <a:p>
+            <a:endParaRPr lang="ja-JP" altLang="en-US"/>
+          </a:p>
+        </p:txBody>
       </p:sp>
       <p:sp>
         <p:nvSpPr>
@@ -11779,7 +12111,7 @@
           <a:bodyPr wrap="square" rtlCol="0" anchor="ctr"/>
           <a:lstStyle/>
           <a:p>
-            <a:pPr algn="ctr" indent="0" marL="0">
+            <a:pPr marL="0" indent="0" algn="ctr">
               <a:buNone/>
             </a:pPr>
             <a:r>
@@ -11818,7 +12150,7 @@
           <a:bodyPr wrap="square" rtlCol="0" anchor="ctr"/>
           <a:lstStyle/>
           <a:p>
-            <a:pPr algn="ctr" indent="0" marL="0">
+            <a:pPr marL="0" indent="0" algn="ctr">
               <a:buNone/>
             </a:pPr>
             <a:r>
@@ -11857,7 +12189,7 @@
           <a:bodyPr wrap="square" rtlCol="0" anchor="ctr"/>
           <a:lstStyle/>
           <a:p>
-            <a:pPr algn="ctr" indent="0" marL="0">
+            <a:pPr marL="0" indent="0" algn="ctr">
               <a:buNone/>
             </a:pPr>
             <a:r>
@@ -11896,7 +12228,7 @@
           <a:bodyPr wrap="square" rtlCol="0" anchor="t"/>
           <a:lstStyle/>
           <a:p>
-            <a:pPr algn="ctr" indent="0" marL="0">
+            <a:pPr marL="0" indent="0" algn="ctr">
               <a:buNone/>
             </a:pPr>
             <a:r>
@@ -11940,6 +12272,13 @@
             <a:prstDash val="solid"/>
           </a:ln>
         </p:spPr>
+        <p:txBody>
+          <a:bodyPr/>
+          <a:lstStyle/>
+          <a:p>
+            <a:endParaRPr lang="ja-JP" altLang="en-US"/>
+          </a:p>
+        </p:txBody>
       </p:sp>
       <p:sp>
         <p:nvSpPr>
@@ -11962,7 +12301,7 @@
           <a:bodyPr wrap="square" rtlCol="0" anchor="ctr"/>
           <a:lstStyle/>
           <a:p>
-            <a:pPr indent="0" marL="0">
+            <a:pPr marL="0" indent="0">
               <a:buNone/>
             </a:pPr>
             <a:r>
@@ -12001,7 +12340,7 @@
           <a:bodyPr wrap="square" rtlCol="0" anchor="ctr"/>
           <a:lstStyle/>
           <a:p>
-            <a:pPr indent="0" marL="0">
+            <a:pPr marL="0" indent="0">
               <a:buNone/>
             </a:pPr>
             <a:r>
@@ -12040,7 +12379,7 @@
           <a:bodyPr wrap="square" rtlCol="0" anchor="ctr"/>
           <a:lstStyle/>
           <a:p>
-            <a:pPr algn="r" indent="0" marL="0">
+            <a:pPr marL="0" indent="0" algn="r">
               <a:buNone/>
             </a:pPr>
             <a:r>
@@ -12079,7 +12418,7 @@
           <a:bodyPr wrap="square" rtlCol="0" anchor="ctr"/>
           <a:lstStyle/>
           <a:p>
-            <a:pPr algn="r" indent="0" marL="0">
+            <a:pPr marL="0" indent="0" algn="r">
               <a:buNone/>
             </a:pPr>
             <a:r>
@@ -12113,6 +12452,7 @@
         <a:solidFill>
           <a:srgbClr val="333333"/>
         </a:solidFill>
+        <a:effectLst/>
       </p:bgPr>
     </p:bg>
     <p:spTree>
@@ -12153,6 +12493,13 @@
             <a:prstDash val="solid"/>
           </a:ln>
         </p:spPr>
+        <p:txBody>
+          <a:bodyPr/>
+          <a:lstStyle/>
+          <a:p>
+            <a:endParaRPr lang="ja-JP" altLang="en-US"/>
+          </a:p>
+        </p:txBody>
       </p:sp>
       <p:sp>
         <p:nvSpPr>
@@ -12175,7 +12522,7 @@
           <a:bodyPr wrap="square" rtlCol="0" anchor="ctr"/>
           <a:lstStyle/>
           <a:p>
-            <a:pPr indent="0" marL="0">
+            <a:pPr marL="0" indent="0">
               <a:buNone/>
             </a:pPr>
             <a:r>
@@ -12214,7 +12561,7 @@
           <a:bodyPr wrap="square" rtlCol="0" anchor="ctr"/>
           <a:lstStyle/>
           <a:p>
-            <a:pPr indent="0" marL="0">
+            <a:pPr marL="0" indent="0">
               <a:buNone/>
             </a:pPr>
             <a:r>
@@ -12253,7 +12600,7 @@
           <a:bodyPr wrap="square" rtlCol="0" anchor="ctr"/>
           <a:lstStyle/>
           <a:p>
-            <a:pPr indent="0" marL="0">
+            <a:pPr marL="0" indent="0">
               <a:buNone/>
             </a:pPr>
             <a:r>
@@ -12292,7 +12639,7 @@
           <a:bodyPr wrap="square" rtlCol="0" anchor="ctr"/>
           <a:lstStyle/>
           <a:p>
-            <a:pPr indent="0" marL="0">
+            <a:pPr marL="0" indent="0">
               <a:buNone/>
             </a:pPr>
             <a:r>
@@ -12331,7 +12678,7 @@
           <a:bodyPr wrap="square" rtlCol="0" anchor="ctr"/>
           <a:lstStyle/>
           <a:p>
-            <a:pPr algn="r" indent="0" marL="0">
+            <a:pPr marL="0" indent="0" algn="r">
               <a:buNone/>
             </a:pPr>
             <a:r>
@@ -12365,6 +12712,7 @@
         <a:solidFill>
           <a:srgbClr val="FFFFFF"/>
         </a:solidFill>
+        <a:effectLst/>
       </p:bgPr>
     </p:bg>
     <p:spTree>
@@ -12405,6 +12753,13 @@
             <a:prstDash val="solid"/>
           </a:ln>
         </p:spPr>
+        <p:txBody>
+          <a:bodyPr/>
+          <a:lstStyle/>
+          <a:p>
+            <a:endParaRPr lang="ja-JP" altLang="en-US"/>
+          </a:p>
+        </p:txBody>
       </p:sp>
       <p:sp>
         <p:nvSpPr>
@@ -12427,7 +12782,7 @@
           <a:bodyPr wrap="square" rtlCol="0" anchor="ctr"/>
           <a:lstStyle/>
           <a:p>
-            <a:pPr indent="0" marL="0">
+            <a:pPr marL="0" indent="0">
               <a:buNone/>
             </a:pPr>
             <a:r>
@@ -12466,7 +12821,7 @@
           <a:bodyPr wrap="square" rtlCol="0" anchor="ctr"/>
           <a:lstStyle/>
           <a:p>
-            <a:pPr algn="r" indent="0" marL="0">
+            <a:pPr marL="0" indent="0" algn="r">
               <a:buNone/>
             </a:pPr>
             <a:r>
@@ -12508,6 +12863,13 @@
             <a:prstDash val="solid"/>
           </a:ln>
         </p:spPr>
+        <p:txBody>
+          <a:bodyPr/>
+          <a:lstStyle/>
+          <a:p>
+            <a:endParaRPr lang="ja-JP" altLang="en-US"/>
+          </a:p>
+        </p:txBody>
       </p:sp>
       <p:sp>
         <p:nvSpPr>
@@ -12535,6 +12897,13 @@
             <a:prstDash val="solid"/>
           </a:ln>
         </p:spPr>
+        <p:txBody>
+          <a:bodyPr/>
+          <a:lstStyle/>
+          <a:p>
+            <a:endParaRPr lang="ja-JP" altLang="en-US"/>
+          </a:p>
+        </p:txBody>
       </p:sp>
       <p:sp>
         <p:nvSpPr>
@@ -12557,7 +12926,7 @@
           <a:bodyPr wrap="square" rtlCol="0" anchor="ctr"/>
           <a:lstStyle/>
           <a:p>
-            <a:pPr indent="0" marL="0">
+            <a:pPr marL="0" indent="0">
               <a:buNone/>
             </a:pPr>
             <a:r>
@@ -12596,6 +12965,13 @@
           </a:solidFill>
           <a:ln/>
         </p:spPr>
+        <p:txBody>
+          <a:bodyPr/>
+          <a:lstStyle/>
+          <a:p>
+            <a:endParaRPr lang="ja-JP" altLang="en-US"/>
+          </a:p>
+        </p:txBody>
       </p:sp>
       <p:sp>
         <p:nvSpPr>
@@ -12618,7 +12994,7 @@
           <a:bodyPr wrap="square" rtlCol="0" anchor="t"/>
           <a:lstStyle/>
           <a:p>
-            <a:pPr indent="0" marL="0">
+            <a:pPr marL="0" indent="0">
               <a:buNone/>
             </a:pPr>
             <a:r>
@@ -12636,7 +13012,7 @@
             <a:endParaRPr lang="en-US" sz="1000" dirty="0"/>
           </a:p>
           <a:p>
-            <a:pPr indent="0" marL="0">
+            <a:pPr marL="0" indent="0">
               <a:buNone/>
             </a:pPr>
             <a:r>
@@ -12654,7 +13030,7 @@
             <a:endParaRPr lang="en-US" sz="1000" dirty="0"/>
           </a:p>
           <a:p>
-            <a:pPr indent="0" marL="0">
+            <a:pPr marL="0" indent="0">
               <a:buNone/>
             </a:pPr>
             <a:r>
@@ -12693,7 +13069,7 @@
           <a:bodyPr wrap="square" rtlCol="0" anchor="t"/>
           <a:lstStyle/>
           <a:p>
-            <a:pPr indent="0" marL="0">
+            <a:pPr marL="0" indent="0">
               <a:buNone/>
             </a:pPr>
             <a:r>
@@ -12737,6 +13113,13 @@
             <a:prstDash val="solid"/>
           </a:ln>
         </p:spPr>
+        <p:txBody>
+          <a:bodyPr/>
+          <a:lstStyle/>
+          <a:p>
+            <a:endParaRPr lang="ja-JP" altLang="en-US"/>
+          </a:p>
+        </p:txBody>
       </p:sp>
       <p:sp>
         <p:nvSpPr>
@@ -12759,7 +13142,7 @@
           <a:bodyPr wrap="square" rtlCol="0" anchor="ctr"/>
           <a:lstStyle/>
           <a:p>
-            <a:pPr indent="0" marL="0">
+            <a:pPr marL="0" indent="0">
               <a:buNone/>
             </a:pPr>
             <a:r>
@@ -12803,6 +13186,13 @@
             <a:prstDash val="solid"/>
           </a:ln>
         </p:spPr>
+        <p:txBody>
+          <a:bodyPr/>
+          <a:lstStyle/>
+          <a:p>
+            <a:endParaRPr lang="ja-JP" altLang="en-US"/>
+          </a:p>
+        </p:txBody>
       </p:sp>
       <p:sp>
         <p:nvSpPr>
@@ -12825,7 +13215,7 @@
           <a:bodyPr wrap="square" rtlCol="0" anchor="ctr"/>
           <a:lstStyle/>
           <a:p>
-            <a:pPr indent="0" marL="0">
+            <a:pPr marL="0" indent="0">
               <a:buNone/>
             </a:pPr>
             <a:r>
@@ -12869,6 +13259,13 @@
             <a:prstDash val="solid"/>
           </a:ln>
         </p:spPr>
+        <p:txBody>
+          <a:bodyPr/>
+          <a:lstStyle/>
+          <a:p>
+            <a:endParaRPr lang="ja-JP" altLang="en-US"/>
+          </a:p>
+        </p:txBody>
       </p:sp>
       <p:sp>
         <p:nvSpPr>
@@ -12891,7 +13288,7 @@
           <a:bodyPr wrap="square" rtlCol="0" anchor="ctr"/>
           <a:lstStyle/>
           <a:p>
-            <a:pPr indent="0" marL="0">
+            <a:pPr marL="0" indent="0">
               <a:buNone/>
             </a:pPr>
             <a:r>
@@ -12935,6 +13332,13 @@
             <a:prstDash val="solid"/>
           </a:ln>
         </p:spPr>
+        <p:txBody>
+          <a:bodyPr/>
+          <a:lstStyle/>
+          <a:p>
+            <a:endParaRPr lang="ja-JP" altLang="en-US"/>
+          </a:p>
+        </p:txBody>
       </p:sp>
       <p:sp>
         <p:nvSpPr>
@@ -12957,7 +13361,7 @@
           <a:bodyPr wrap="square" rtlCol="0" anchor="ctr"/>
           <a:lstStyle/>
           <a:p>
-            <a:pPr indent="0" marL="0">
+            <a:pPr marL="0" indent="0">
               <a:buNone/>
             </a:pPr>
             <a:r>
@@ -12996,7 +13400,7 @@
           <a:bodyPr wrap="square" rtlCol="0" anchor="t"/>
           <a:lstStyle/>
           <a:p>
-            <a:pPr indent="0" marL="0">
+            <a:pPr marL="0" indent="0">
               <a:buNone/>
             </a:pPr>
             <a:r>
@@ -13035,7 +13439,7 @@
           <a:bodyPr wrap="square" rtlCol="0" anchor="ctr"/>
           <a:lstStyle/>
           <a:p>
-            <a:pPr indent="0" marL="0">
+            <a:pPr marL="0" indent="0">
               <a:buNone/>
             </a:pPr>
             <a:r>
@@ -13074,7 +13478,7 @@
           <a:bodyPr wrap="square" rtlCol="0" anchor="ctr"/>
           <a:lstStyle/>
           <a:p>
-            <a:pPr indent="0" marL="0">
+            <a:pPr marL="0" indent="0">
               <a:buNone/>
             </a:pPr>
             <a:r>
@@ -13113,7 +13517,7 @@
           <a:bodyPr wrap="square" rtlCol="0" anchor="ctr"/>
           <a:lstStyle/>
           <a:p>
-            <a:pPr algn="r" indent="0" marL="0">
+            <a:pPr marL="0" indent="0" algn="r">
               <a:buNone/>
             </a:pPr>
             <a:r>
@@ -13152,7 +13556,7 @@
           <a:bodyPr wrap="square" rtlCol="0" anchor="ctr"/>
           <a:lstStyle/>
           <a:p>
-            <a:pPr algn="r" indent="0" marL="0">
+            <a:pPr marL="0" indent="0" algn="r">
               <a:buNone/>
             </a:pPr>
             <a:r>
@@ -13471,4 +13875,319 @@
     </a:ext>
   </a:extLst>
 </a:theme>
+</file>
+
+<file path=ppt/theme/theme2.xml><?xml version="1.0" encoding="utf-8"?>
+<a:theme xmlns:a="http://schemas.openxmlformats.org/drawingml/2006/main" name="Office テーマ">
+  <a:themeElements>
+    <a:clrScheme name="Office">
+      <a:dk1>
+        <a:sysClr val="windowText" lastClr="000000"/>
+      </a:dk1>
+      <a:lt1>
+        <a:sysClr val="window" lastClr="FFFFFF"/>
+      </a:lt1>
+      <a:dk2>
+        <a:srgbClr val="0E2841"/>
+      </a:dk2>
+      <a:lt2>
+        <a:srgbClr val="E8E8E8"/>
+      </a:lt2>
+      <a:accent1>
+        <a:srgbClr val="156082"/>
+      </a:accent1>
+      <a:accent2>
+        <a:srgbClr val="E97132"/>
+      </a:accent2>
+      <a:accent3>
+        <a:srgbClr val="196B24"/>
+      </a:accent3>
+      <a:accent4>
+        <a:srgbClr val="0F9ED5"/>
+      </a:accent4>
+      <a:accent5>
+        <a:srgbClr val="A02B93"/>
+      </a:accent5>
+      <a:accent6>
+        <a:srgbClr val="4EA72E"/>
+      </a:accent6>
+      <a:hlink>
+        <a:srgbClr val="467886"/>
+      </a:hlink>
+      <a:folHlink>
+        <a:srgbClr val="96607D"/>
+      </a:folHlink>
+    </a:clrScheme>
+    <a:fontScheme name="Office">
+      <a:majorFont>
+        <a:latin typeface="游ゴシック Light" panose="02110004020202020204"/>
+        <a:ea typeface=""/>
+        <a:cs typeface=""/>
+        <a:font script="Jpan" typeface="游ゴシック Light"/>
+        <a:font script="Hang" typeface="맑은 고딕"/>
+        <a:font script="Hans" typeface="等线 Light"/>
+        <a:font script="Hant" typeface="新細明體"/>
+        <a:font script="Arab" typeface="Times New Roman"/>
+        <a:font script="Hebr" typeface="Times New Roman"/>
+        <a:font script="Thai" typeface="Angsana New"/>
+        <a:font script="Ethi" typeface="Nyala"/>
+        <a:font script="Beng" typeface="Vrinda"/>
+        <a:font script="Gujr" typeface="Shruti"/>
+        <a:font script="Khmr" typeface="MoolBoran"/>
+        <a:font script="Knda" typeface="Tunga"/>
+        <a:font script="Guru" typeface="Raavi"/>
+        <a:font script="Cans" typeface="Euphemia"/>
+        <a:font script="Cher" typeface="Plantagenet Cherokee"/>
+        <a:font script="Yiii" typeface="Microsoft Yi Baiti"/>
+        <a:font script="Tibt" typeface="Microsoft Himalaya"/>
+        <a:font script="Thaa" typeface="MV Boli"/>
+        <a:font script="Deva" typeface="Mangal"/>
+        <a:font script="Telu" typeface="Gautami"/>
+        <a:font script="Taml" typeface="Latha"/>
+        <a:font script="Syrc" typeface="Estrangelo Edessa"/>
+        <a:font script="Orya" typeface="Kalinga"/>
+        <a:font script="Mlym" typeface="Kartika"/>
+        <a:font script="Laoo" typeface="DokChampa"/>
+        <a:font script="Sinh" typeface="Iskoola Pota"/>
+        <a:font script="Mong" typeface="Mongolian Baiti"/>
+        <a:font script="Viet" typeface="Times New Roman"/>
+        <a:font script="Uigh" typeface="Microsoft Uighur"/>
+        <a:font script="Geor" typeface="Sylfaen"/>
+        <a:font script="Armn" typeface="Arial"/>
+        <a:font script="Bugi" typeface="Leelawadee UI"/>
+        <a:font script="Bopo" typeface="Microsoft JhengHei"/>
+        <a:font script="Java" typeface="Javanese Text"/>
+        <a:font script="Lisu" typeface="Segoe UI"/>
+        <a:font script="Mymr" typeface="Myanmar Text"/>
+        <a:font script="Nkoo" typeface="Ebrima"/>
+        <a:font script="Olck" typeface="Nirmala UI"/>
+        <a:font script="Osma" typeface="Ebrima"/>
+        <a:font script="Phag" typeface="Phagspa"/>
+        <a:font script="Syrn" typeface="Estrangelo Edessa"/>
+        <a:font script="Syrj" typeface="Estrangelo Edessa"/>
+        <a:font script="Syre" typeface="Estrangelo Edessa"/>
+        <a:font script="Sora" typeface="Nirmala UI"/>
+        <a:font script="Tale" typeface="Microsoft Tai Le"/>
+        <a:font script="Talu" typeface="Microsoft New Tai Lue"/>
+        <a:font script="Tfng" typeface="Ebrima"/>
+      </a:majorFont>
+      <a:minorFont>
+        <a:latin typeface="游ゴシック" panose="02110004020202020204"/>
+        <a:ea typeface=""/>
+        <a:cs typeface=""/>
+        <a:font script="Jpan" typeface="游ゴシック"/>
+        <a:font script="Hang" typeface="맑은 고딕"/>
+        <a:font script="Hans" typeface="等线"/>
+        <a:font script="Hant" typeface="新細明體"/>
+        <a:font script="Arab" typeface="Arial"/>
+        <a:font script="Hebr" typeface="Arial"/>
+        <a:font script="Thai" typeface="Cordia New"/>
+        <a:font script="Ethi" typeface="Nyala"/>
+        <a:font script="Beng" typeface="Vrinda"/>
+        <a:font script="Gujr" typeface="Shruti"/>
+        <a:font script="Khmr" typeface="DaunPenh"/>
+        <a:font script="Knda" typeface="Tunga"/>
+        <a:font script="Guru" typeface="Raavi"/>
+        <a:font script="Cans" typeface="Euphemia"/>
+        <a:font script="Cher" typeface="Plantagenet Cherokee"/>
+        <a:font script="Yiii" typeface="Microsoft Yi Baiti"/>
+        <a:font script="Tibt" typeface="Microsoft Himalaya"/>
+        <a:font script="Thaa" typeface="MV Boli"/>
+        <a:font script="Deva" typeface="Mangal"/>
+        <a:font script="Telu" typeface="Gautami"/>
+        <a:font script="Taml" typeface="Latha"/>
+        <a:font script="Syrc" typeface="Estrangelo Edessa"/>
+        <a:font script="Orya" typeface="Kalinga"/>
+        <a:font script="Mlym" typeface="Kartika"/>
+        <a:font script="Laoo" typeface="DokChampa"/>
+        <a:font script="Sinh" typeface="Iskoola Pota"/>
+        <a:font script="Mong" typeface="Mongolian Baiti"/>
+        <a:font script="Viet" typeface="Arial"/>
+        <a:font script="Uigh" typeface="Microsoft Uighur"/>
+        <a:font script="Geor" typeface="Sylfaen"/>
+        <a:font script="Armn" typeface="Arial"/>
+        <a:font script="Bugi" typeface="Leelawadee UI"/>
+        <a:font script="Bopo" typeface="Microsoft JhengHei"/>
+        <a:font script="Java" typeface="Javanese Text"/>
+        <a:font script="Lisu" typeface="Segoe UI"/>
+        <a:font script="Mymr" typeface="Myanmar Text"/>
+        <a:font script="Nkoo" typeface="Ebrima"/>
+        <a:font script="Olck" typeface="Nirmala UI"/>
+        <a:font script="Osma" typeface="Ebrima"/>
+        <a:font script="Phag" typeface="Phagspa"/>
+        <a:font script="Syrn" typeface="Estrangelo Edessa"/>
+        <a:font script="Syrj" typeface="Estrangelo Edessa"/>
+        <a:font script="Syre" typeface="Estrangelo Edessa"/>
+        <a:font script="Sora" typeface="Nirmala UI"/>
+        <a:font script="Tale" typeface="Microsoft Tai Le"/>
+        <a:font script="Talu" typeface="Microsoft New Tai Lue"/>
+        <a:font script="Tfng" typeface="Ebrima"/>
+      </a:minorFont>
+    </a:fontScheme>
+    <a:fmtScheme name="Office">
+      <a:fillStyleLst>
+        <a:solidFill>
+          <a:schemeClr val="phClr"/>
+        </a:solidFill>
+        <a:gradFill rotWithShape="1">
+          <a:gsLst>
+            <a:gs pos="0">
+              <a:schemeClr val="phClr">
+                <a:lumMod val="110000"/>
+                <a:satMod val="105000"/>
+                <a:tint val="67000"/>
+              </a:schemeClr>
+            </a:gs>
+            <a:gs pos="50000">
+              <a:schemeClr val="phClr">
+                <a:lumMod val="105000"/>
+                <a:satMod val="103000"/>
+                <a:tint val="73000"/>
+              </a:schemeClr>
+            </a:gs>
+            <a:gs pos="100000">
+              <a:schemeClr val="phClr">
+                <a:lumMod val="105000"/>
+                <a:satMod val="109000"/>
+                <a:tint val="81000"/>
+              </a:schemeClr>
+            </a:gs>
+          </a:gsLst>
+          <a:lin ang="5400000" scaled="0"/>
+        </a:gradFill>
+        <a:gradFill rotWithShape="1">
+          <a:gsLst>
+            <a:gs pos="0">
+              <a:schemeClr val="phClr">
+                <a:satMod val="103000"/>
+                <a:lumMod val="102000"/>
+                <a:tint val="94000"/>
+              </a:schemeClr>
+            </a:gs>
+            <a:gs pos="50000">
+              <a:schemeClr val="phClr">
+                <a:satMod val="110000"/>
+                <a:lumMod val="100000"/>
+                <a:shade val="100000"/>
+              </a:schemeClr>
+            </a:gs>
+            <a:gs pos="100000">
+              <a:schemeClr val="phClr">
+                <a:lumMod val="99000"/>
+                <a:satMod val="120000"/>
+                <a:shade val="78000"/>
+              </a:schemeClr>
+            </a:gs>
+          </a:gsLst>
+          <a:lin ang="5400000" scaled="0"/>
+        </a:gradFill>
+      </a:fillStyleLst>
+      <a:lnStyleLst>
+        <a:ln w="12700" cap="flat" cmpd="sng" algn="ctr">
+          <a:solidFill>
+            <a:schemeClr val="phClr"/>
+          </a:solidFill>
+          <a:prstDash val="solid"/>
+          <a:miter lim="800000"/>
+        </a:ln>
+        <a:ln w="19050" cap="flat" cmpd="sng" algn="ctr">
+          <a:solidFill>
+            <a:schemeClr val="phClr"/>
+          </a:solidFill>
+          <a:prstDash val="solid"/>
+          <a:miter lim="800000"/>
+        </a:ln>
+        <a:ln w="25400" cap="flat" cmpd="sng" algn="ctr">
+          <a:solidFill>
+            <a:schemeClr val="phClr"/>
+          </a:solidFill>
+          <a:prstDash val="solid"/>
+          <a:miter lim="800000"/>
+        </a:ln>
+      </a:lnStyleLst>
+      <a:effectStyleLst>
+        <a:effectStyle>
+          <a:effectLst/>
+        </a:effectStyle>
+        <a:effectStyle>
+          <a:effectLst/>
+        </a:effectStyle>
+        <a:effectStyle>
+          <a:effectLst>
+            <a:outerShdw blurRad="57150" dist="19050" dir="5400000" algn="ctr" rotWithShape="0">
+              <a:srgbClr val="000000">
+                <a:alpha val="63000"/>
+              </a:srgbClr>
+            </a:outerShdw>
+          </a:effectLst>
+        </a:effectStyle>
+      </a:effectStyleLst>
+      <a:bgFillStyleLst>
+        <a:solidFill>
+          <a:schemeClr val="phClr"/>
+        </a:solidFill>
+        <a:solidFill>
+          <a:schemeClr val="phClr">
+            <a:tint val="95000"/>
+            <a:satMod val="170000"/>
+          </a:schemeClr>
+        </a:solidFill>
+        <a:gradFill rotWithShape="1">
+          <a:gsLst>
+            <a:gs pos="0">
+              <a:schemeClr val="phClr">
+                <a:tint val="93000"/>
+                <a:satMod val="150000"/>
+                <a:shade val="98000"/>
+                <a:lumMod val="102000"/>
+              </a:schemeClr>
+            </a:gs>
+            <a:gs pos="50000">
+              <a:schemeClr val="phClr">
+                <a:tint val="98000"/>
+                <a:satMod val="130000"/>
+                <a:shade val="90000"/>
+                <a:lumMod val="103000"/>
+              </a:schemeClr>
+            </a:gs>
+            <a:gs pos="100000">
+              <a:schemeClr val="phClr">
+                <a:shade val="63000"/>
+                <a:satMod val="120000"/>
+              </a:schemeClr>
+            </a:gs>
+          </a:gsLst>
+          <a:lin ang="5400000" scaled="0"/>
+        </a:gradFill>
+      </a:bgFillStyleLst>
+    </a:fmtScheme>
+  </a:themeElements>
+  <a:objectDefaults>
+    <a:lnDef>
+      <a:spPr/>
+      <a:bodyPr/>
+      <a:lstStyle/>
+      <a:style>
+        <a:lnRef idx="2">
+          <a:schemeClr val="accent1"/>
+        </a:lnRef>
+        <a:fillRef idx="0">
+          <a:schemeClr val="accent1"/>
+        </a:fillRef>
+        <a:effectRef idx="1">
+          <a:schemeClr val="accent1"/>
+        </a:effectRef>
+        <a:fontRef idx="minor">
+          <a:schemeClr val="tx1"/>
+        </a:fontRef>
+      </a:style>
+    </a:lnDef>
+  </a:objectDefaults>
+  <a:extraClrSchemeLst/>
+  <a:extLst>
+    <a:ext uri="{05A4C25C-085E-4340-85A3-A5531E510DB2}">
+      <thm15:themeFamily xmlns:thm15="http://schemas.microsoft.com/office/thememl/2012/main" name="Office Theme" id="{2E142A2C-CD16-42D6-873A-C26D2A0506FA}" vid="{1BDDFF52-6CD6-40A5-AB3C-68EB2F1E4D0A}"/>
+    </a:ext>
+  </a:extLst>
+</a:theme>
 </file>